--- a/sample_data/wa_energy_output.pptx
+++ b/sample_data/wa_energy_output.pptx
@@ -21,7 +21,6 @@
     <p:sldId id="263" r:id="rId35"/>
     <p:sldId id="264" r:id="rId36"/>
     <p:sldId id="265" r:id="rId37"/>
-    <p:sldId id="266" r:id="rId38"/>
   </p:sldIdLst>
   <p:sldSz cx="12192000" cy="6858000"/>
   <p:notesSz cx="6858000" cy="9144000"/>
@@ -6977,7 +6976,7 @@
           <a:lstStyle/>
           <a:p>
             <a:r>
-              <a:t>Base: respondents without solar (n=473)</a:t>
+              <a:t>Base: those who support a target (n=626)</a:t>
             </a:r>
           </a:p>
         </p:txBody>
@@ -6998,7 +6997,7 @@
           <a:lstStyle/>
           <a:p>
             <a:r>
-              <a:t>Considering installing rooftop solar</a:t>
+              <a:t>Main reason for supporting a renewable energy target</a:t>
             </a:r>
           </a:p>
         </p:txBody>
@@ -7019,35 +7018,757 @@
           <a:lstStyle/>
           <a:p>
             <a:r>
-              <a:t>Are you considering installing rooftop solar? (%)</a:t>
-            </a:r>
-          </a:p>
-        </p:txBody>
-      </p:sp>
-      <p:pic>
-        <p:nvPicPr>
-          <p:cNvPr id="5" name="Picture 4" descr="image.png"/>
-          <p:cNvPicPr>
-            <a:picLocks noChangeAspect="1"/>
-          </p:cNvPicPr>
+              <a:t>What is the main reason for supporting a target? (%, among supporters)</a:t>
+            </a:r>
+          </a:p>
+        </p:txBody>
+      </p:sp>
+      <p:graphicFrame>
+        <p:nvGraphicFramePr>
+          <p:cNvPr id="5" name="Table 4"/>
+          <p:cNvGraphicFramePr>
+            <a:graphicFrameLocks noGrp="1"/>
+          </p:cNvGraphicFramePr>
           <p:nvPr/>
-        </p:nvPicPr>
-        <p:blipFill>
-          <a:blip r:embed="rId2"/>
-          <a:stretch>
-            <a:fillRect/>
-          </a:stretch>
-        </p:blipFill>
-        <p:spPr>
-          <a:xfrm>
-            <a:off x="310896" y="1709928"/>
-            <a:ext cx="5303520" cy="4114800"/>
-          </a:xfrm>
-          <a:prstGeom prst="rect">
-            <a:avLst/>
-          </a:prstGeom>
-        </p:spPr>
-      </p:pic>
+        </p:nvGraphicFramePr>
+        <p:xfrm>
+          <a:off x="310896" y="1709928"/>
+          <a:ext cx="5303519" cy="4599432"/>
+        </p:xfrm>
+        <a:graphic>
+          <a:graphicData uri="http://schemas.openxmlformats.org/drawingml/2006/table">
+            <a:tbl>
+              <a:tblPr firstRow="1" bandRow="1">
+                <a:tableStyleId>{5C22544A-7EE6-4342-B048-85BDC9FD1C3A}</a:tableStyleId>
+              </a:tblPr>
+              <a:tblGrid>
+                <a:gridCol w="4136745"/>
+                <a:gridCol w="1166774"/>
+              </a:tblGrid>
+              <a:tr h="306628">
+                <a:tc>
+                  <a:txBody>
+                    <a:bodyPr wrap="none"/>
+                    <a:lstStyle/>
+                    <a:p>
+                      <a:pPr algn="l"/>
+                      <a:r>
+                        <a:rPr sz="1100" b="1">
+                          <a:solidFill>
+                            <a:srgbClr val="FFFFFF"/>
+                          </a:solidFill>
+                          <a:latin typeface="DM Sans"/>
+                        </a:rPr>
+                        <a:t>Response</a:t>
+                      </a:r>
+                    </a:p>
+                  </a:txBody>
+                  <a:tcPr>
+                    <a:solidFill>
+                      <a:srgbClr val="027F7C"/>
+                    </a:solidFill>
+                  </a:tcPr>
+                </a:tc>
+                <a:tc>
+                  <a:txBody>
+                    <a:bodyPr wrap="none"/>
+                    <a:lstStyle/>
+                    <a:p>
+                      <a:pPr algn="ctr"/>
+                      <a:r>
+                        <a:rPr sz="1100" b="1">
+                          <a:solidFill>
+                            <a:srgbClr val="FFFFFF"/>
+                          </a:solidFill>
+                          <a:latin typeface="DM Sans"/>
+                        </a:rPr>
+                        <a:t>%</a:t>
+                      </a:r>
+                    </a:p>
+                  </a:txBody>
+                  <a:tcPr>
+                    <a:solidFill>
+                      <a:srgbClr val="027F7C"/>
+                    </a:solidFill>
+                  </a:tcPr>
+                </a:tc>
+              </a:tr>
+              <a:tr h="306628">
+                <a:tc>
+                  <a:txBody>
+                    <a:bodyPr wrap="none"/>
+                    <a:lstStyle/>
+                    <a:p>
+                      <a:pPr algn="l"/>
+                      <a:r>
+                        <a:rPr sz="1000" b="1">
+                          <a:solidFill>
+                            <a:srgbClr val="027F7C"/>
+                          </a:solidFill>
+                          <a:latin typeface="DM Sans"/>
+                        </a:rPr>
+                        <a:t>Clear goals &amp; direction</a:t>
+                      </a:r>
+                    </a:p>
+                  </a:txBody>
+                  <a:tcPr>
+                    <a:solidFill>
+                      <a:srgbClr val="FFFFFF"/>
+                    </a:solidFill>
+                  </a:tcPr>
+                </a:tc>
+                <a:tc>
+                  <a:txBody>
+                    <a:bodyPr wrap="none"/>
+                    <a:lstStyle/>
+                    <a:p>
+                      <a:pPr algn="ctr"/>
+                      <a:r>
+                        <a:rPr sz="1000" b="1">
+                          <a:solidFill>
+                            <a:srgbClr val="027F7C"/>
+                          </a:solidFill>
+                          <a:latin typeface="DM Sans"/>
+                        </a:rPr>
+                        <a:t>25%</a:t>
+                      </a:r>
+                    </a:p>
+                  </a:txBody>
+                  <a:tcPr>
+                    <a:solidFill>
+                      <a:srgbClr val="FFFFFF"/>
+                    </a:solidFill>
+                  </a:tcPr>
+                </a:tc>
+              </a:tr>
+              <a:tr h="306628">
+                <a:tc>
+                  <a:txBody>
+                    <a:bodyPr wrap="none"/>
+                    <a:lstStyle/>
+                    <a:p>
+                      <a:pPr algn="l"/>
+                      <a:r>
+                        <a:rPr sz="1000" b="0">
+                          <a:solidFill>
+                            <a:srgbClr val="44546A"/>
+                          </a:solidFill>
+                          <a:latin typeface="DM Sans"/>
+                        </a:rPr>
+                        <a:t>“Right thing to do” / general support: Values-based support without a specific reason.</a:t>
+                      </a:r>
+                    </a:p>
+                  </a:txBody>
+                  <a:tcPr>
+                    <a:solidFill>
+                      <a:srgbClr val="E6F8F9"/>
+                    </a:solidFill>
+                  </a:tcPr>
+                </a:tc>
+                <a:tc>
+                  <a:txBody>
+                    <a:bodyPr wrap="none"/>
+                    <a:lstStyle/>
+                    <a:p>
+                      <a:pPr algn="ctr"/>
+                      <a:r>
+                        <a:rPr sz="1000" b="1">
+                          <a:solidFill>
+                            <a:srgbClr val="027F7C"/>
+                          </a:solidFill>
+                          <a:latin typeface="DM Sans"/>
+                        </a:rPr>
+                        <a:t>23%</a:t>
+                      </a:r>
+                    </a:p>
+                  </a:txBody>
+                  <a:tcPr>
+                    <a:solidFill>
+                      <a:srgbClr val="E6F8F9"/>
+                    </a:solidFill>
+                  </a:tcPr>
+                </a:tc>
+              </a:tr>
+              <a:tr h="306628">
+                <a:tc>
+                  <a:txBody>
+                    <a:bodyPr wrap="none"/>
+                    <a:lstStyle/>
+                    <a:p>
+                      <a:pPr algn="l"/>
+                      <a:r>
+                        <a:rPr sz="1000" b="0">
+                          <a:solidFill>
+                            <a:srgbClr val="44546A"/>
+                          </a:solidFill>
+                          <a:latin typeface="DM Sans"/>
+                        </a:rPr>
+                        <a:t>Better environment &amp; health</a:t>
+                      </a:r>
+                    </a:p>
+                  </a:txBody>
+                  <a:tcPr>
+                    <a:solidFill>
+                      <a:srgbClr val="FFFFFF"/>
+                    </a:solidFill>
+                  </a:tcPr>
+                </a:tc>
+                <a:tc>
+                  <a:txBody>
+                    <a:bodyPr wrap="none"/>
+                    <a:lstStyle/>
+                    <a:p>
+                      <a:pPr algn="ctr"/>
+                      <a:r>
+                        <a:rPr sz="1000" b="1">
+                          <a:solidFill>
+                            <a:srgbClr val="44546A"/>
+                          </a:solidFill>
+                          <a:latin typeface="DM Sans"/>
+                        </a:rPr>
+                        <a:t>16%</a:t>
+                      </a:r>
+                    </a:p>
+                  </a:txBody>
+                  <a:tcPr>
+                    <a:solidFill>
+                      <a:srgbClr val="FFFFFF"/>
+                    </a:solidFill>
+                  </a:tcPr>
+                </a:tc>
+              </a:tr>
+              <a:tr h="306628">
+                <a:tc>
+                  <a:txBody>
+                    <a:bodyPr wrap="none"/>
+                    <a:lstStyle/>
+                    <a:p>
+                      <a:pPr algn="l"/>
+                      <a:r>
+                        <a:rPr sz="1000" b="0">
+                          <a:solidFill>
+                            <a:srgbClr val="44546A"/>
+                          </a:solidFill>
+                          <a:latin typeface="DM Sans"/>
+                        </a:rPr>
+                        <a:t>Climate &amp; emissions reduction</a:t>
+                      </a:r>
+                    </a:p>
+                  </a:txBody>
+                  <a:tcPr>
+                    <a:solidFill>
+                      <a:srgbClr val="E6F8F9"/>
+                    </a:solidFill>
+                  </a:tcPr>
+                </a:tc>
+                <a:tc>
+                  <a:txBody>
+                    <a:bodyPr wrap="none"/>
+                    <a:lstStyle/>
+                    <a:p>
+                      <a:pPr algn="ctr"/>
+                      <a:r>
+                        <a:rPr sz="1000" b="1">
+                          <a:solidFill>
+                            <a:srgbClr val="44546A"/>
+                          </a:solidFill>
+                          <a:latin typeface="DM Sans"/>
+                        </a:rPr>
+                        <a:t>14%</a:t>
+                      </a:r>
+                    </a:p>
+                  </a:txBody>
+                  <a:tcPr>
+                    <a:solidFill>
+                      <a:srgbClr val="E6F8F9"/>
+                    </a:solidFill>
+                  </a:tcPr>
+                </a:tc>
+              </a:tr>
+              <a:tr h="306628">
+                <a:tc>
+                  <a:txBody>
+                    <a:bodyPr wrap="none"/>
+                    <a:lstStyle/>
+                    <a:p>
+                      <a:pPr algn="l"/>
+                      <a:r>
+                        <a:rPr sz="1000" b="0">
+                          <a:solidFill>
+                            <a:srgbClr val="44546A"/>
+                          </a:solidFill>
+                          <a:latin typeface="DM Sans"/>
+                        </a:rPr>
+                        <a:t>Reduce fossil fuel reliance</a:t>
+                      </a:r>
+                    </a:p>
+                  </a:txBody>
+                  <a:tcPr>
+                    <a:solidFill>
+                      <a:srgbClr val="FFFFFF"/>
+                    </a:solidFill>
+                  </a:tcPr>
+                </a:tc>
+                <a:tc>
+                  <a:txBody>
+                    <a:bodyPr wrap="none"/>
+                    <a:lstStyle/>
+                    <a:p>
+                      <a:pPr algn="ctr"/>
+                      <a:r>
+                        <a:rPr sz="1000" b="1">
+                          <a:solidFill>
+                            <a:srgbClr val="44546A"/>
+                          </a:solidFill>
+                          <a:latin typeface="DM Sans"/>
+                        </a:rPr>
+                        <a:t>11%</a:t>
+                      </a:r>
+                    </a:p>
+                  </a:txBody>
+                  <a:tcPr>
+                    <a:solidFill>
+                      <a:srgbClr val="FFFFFF"/>
+                    </a:solidFill>
+                  </a:tcPr>
+                </a:tc>
+              </a:tr>
+              <a:tr h="306628">
+                <a:tc>
+                  <a:txBody>
+                    <a:bodyPr wrap="none"/>
+                    <a:lstStyle/>
+                    <a:p>
+                      <a:pPr algn="l"/>
+                      <a:r>
+                        <a:rPr sz="1000" b="0">
+                          <a:solidFill>
+                            <a:srgbClr val="44546A"/>
+                          </a:solidFill>
+                          <a:latin typeface="DM Sans"/>
+                        </a:rPr>
+                        <a:t>Accountability &amp; measurement</a:t>
+                      </a:r>
+                    </a:p>
+                  </a:txBody>
+                  <a:tcPr>
+                    <a:solidFill>
+                      <a:srgbClr val="E6F8F9"/>
+                    </a:solidFill>
+                  </a:tcPr>
+                </a:tc>
+                <a:tc>
+                  <a:txBody>
+                    <a:bodyPr wrap="none"/>
+                    <a:lstStyle/>
+                    <a:p>
+                      <a:pPr algn="ctr"/>
+                      <a:r>
+                        <a:rPr sz="1000" b="1">
+                          <a:solidFill>
+                            <a:srgbClr val="44546A"/>
+                          </a:solidFill>
+                          <a:latin typeface="DM Sans"/>
+                        </a:rPr>
+                        <a:t>10%</a:t>
+                      </a:r>
+                    </a:p>
+                  </a:txBody>
+                  <a:tcPr>
+                    <a:solidFill>
+                      <a:srgbClr val="E6F8F9"/>
+                    </a:solidFill>
+                  </a:tcPr>
+                </a:tc>
+              </a:tr>
+              <a:tr h="306628">
+                <a:tc>
+                  <a:txBody>
+                    <a:bodyPr wrap="none"/>
+                    <a:lstStyle/>
+                    <a:p>
+                      <a:pPr algn="l"/>
+                      <a:r>
+                        <a:rPr sz="1000" b="0">
+                          <a:solidFill>
+                            <a:srgbClr val="44546A"/>
+                          </a:solidFill>
+                          <a:latin typeface="DM Sans"/>
+                        </a:rPr>
+                        <a:t>Cheaper power over time</a:t>
+                      </a:r>
+                    </a:p>
+                  </a:txBody>
+                  <a:tcPr>
+                    <a:solidFill>
+                      <a:srgbClr val="FFFFFF"/>
+                    </a:solidFill>
+                  </a:tcPr>
+                </a:tc>
+                <a:tc>
+                  <a:txBody>
+                    <a:bodyPr wrap="none"/>
+                    <a:lstStyle/>
+                    <a:p>
+                      <a:pPr algn="ctr"/>
+                      <a:r>
+                        <a:rPr sz="1000" b="1">
+                          <a:solidFill>
+                            <a:srgbClr val="44546A"/>
+                          </a:solidFill>
+                          <a:latin typeface="DM Sans"/>
+                        </a:rPr>
+                        <a:t>10%</a:t>
+                      </a:r>
+                    </a:p>
+                  </a:txBody>
+                  <a:tcPr>
+                    <a:solidFill>
+                      <a:srgbClr val="FFFFFF"/>
+                    </a:solidFill>
+                  </a:tcPr>
+                </a:tc>
+              </a:tr>
+              <a:tr h="306628">
+                <a:tc>
+                  <a:txBody>
+                    <a:bodyPr wrap="none"/>
+                    <a:lstStyle/>
+                    <a:p>
+                      <a:pPr algn="l"/>
+                      <a:r>
+                        <a:rPr sz="1000" b="0">
+                          <a:solidFill>
+                            <a:srgbClr val="44546A"/>
+                          </a:solidFill>
+                          <a:latin typeface="DM Sans"/>
+                        </a:rPr>
+                        <a:t>Future generations</a:t>
+                      </a:r>
+                    </a:p>
+                  </a:txBody>
+                  <a:tcPr>
+                    <a:solidFill>
+                      <a:srgbClr val="E6F8F9"/>
+                    </a:solidFill>
+                  </a:tcPr>
+                </a:tc>
+                <a:tc>
+                  <a:txBody>
+                    <a:bodyPr wrap="none"/>
+                    <a:lstStyle/>
+                    <a:p>
+                      <a:pPr algn="ctr"/>
+                      <a:r>
+                        <a:rPr sz="1000" b="1">
+                          <a:solidFill>
+                            <a:srgbClr val="44546A"/>
+                          </a:solidFill>
+                          <a:latin typeface="DM Sans"/>
+                        </a:rPr>
+                        <a:t>7%</a:t>
+                      </a:r>
+                    </a:p>
+                  </a:txBody>
+                  <a:tcPr>
+                    <a:solidFill>
+                      <a:srgbClr val="E6F8F9"/>
+                    </a:solidFill>
+                  </a:tcPr>
+                </a:tc>
+              </a:tr>
+              <a:tr h="306628">
+                <a:tc>
+                  <a:txBody>
+                    <a:bodyPr wrap="none"/>
+                    <a:lstStyle/>
+                    <a:p>
+                      <a:pPr algn="l"/>
+                      <a:r>
+                        <a:rPr sz="1000" b="0">
+                          <a:solidFill>
+                            <a:srgbClr val="44546A"/>
+                          </a:solidFill>
+                          <a:latin typeface="DM Sans"/>
+                        </a:rPr>
+                        <a:t>Conditional / feasibility</a:t>
+                      </a:r>
+                    </a:p>
+                  </a:txBody>
+                  <a:tcPr>
+                    <a:solidFill>
+                      <a:srgbClr val="FFFFFF"/>
+                    </a:solidFill>
+                  </a:tcPr>
+                </a:tc>
+                <a:tc>
+                  <a:txBody>
+                    <a:bodyPr wrap="none"/>
+                    <a:lstStyle/>
+                    <a:p>
+                      <a:pPr algn="ctr"/>
+                      <a:r>
+                        <a:rPr sz="1000" b="1">
+                          <a:solidFill>
+                            <a:srgbClr val="44546A"/>
+                          </a:solidFill>
+                          <a:latin typeface="DM Sans"/>
+                        </a:rPr>
+                        <a:t>6%</a:t>
+                      </a:r>
+                    </a:p>
+                  </a:txBody>
+                  <a:tcPr>
+                    <a:solidFill>
+                      <a:srgbClr val="FFFFFF"/>
+                    </a:solidFill>
+                  </a:tcPr>
+                </a:tc>
+              </a:tr>
+              <a:tr h="306628">
+                <a:tc>
+                  <a:txBody>
+                    <a:bodyPr wrap="none"/>
+                    <a:lstStyle/>
+                    <a:p>
+                      <a:pPr algn="l"/>
+                      <a:r>
+                        <a:rPr sz="1000" b="0">
+                          <a:solidFill>
+                            <a:srgbClr val="44546A"/>
+                          </a:solidFill>
+                          <a:latin typeface="DM Sans"/>
+                        </a:rPr>
+                        <a:t>Economic opportunity &amp; jobs</a:t>
+                      </a:r>
+                    </a:p>
+                  </a:txBody>
+                  <a:tcPr>
+                    <a:solidFill>
+                      <a:srgbClr val="E6F8F9"/>
+                    </a:solidFill>
+                  </a:tcPr>
+                </a:tc>
+                <a:tc>
+                  <a:txBody>
+                    <a:bodyPr wrap="none"/>
+                    <a:lstStyle/>
+                    <a:p>
+                      <a:pPr algn="ctr"/>
+                      <a:r>
+                        <a:rPr sz="1000" b="1">
+                          <a:solidFill>
+                            <a:srgbClr val="44546A"/>
+                          </a:solidFill>
+                          <a:latin typeface="DM Sans"/>
+                        </a:rPr>
+                        <a:t>6%</a:t>
+                      </a:r>
+                    </a:p>
+                  </a:txBody>
+                  <a:tcPr>
+                    <a:solidFill>
+                      <a:srgbClr val="E6F8F9"/>
+                    </a:solidFill>
+                  </a:tcPr>
+                </a:tc>
+              </a:tr>
+              <a:tr h="306628">
+                <a:tc>
+                  <a:txBody>
+                    <a:bodyPr wrap="none"/>
+                    <a:lstStyle/>
+                    <a:p>
+                      <a:pPr algn="l"/>
+                      <a:r>
+                        <a:rPr sz="1000" b="0">
+                          <a:solidFill>
+                            <a:srgbClr val="44546A"/>
+                          </a:solidFill>
+                          <a:latin typeface="DM Sans"/>
+                        </a:rPr>
+                        <a:t>Energy security &amp; reliability</a:t>
+                      </a:r>
+                    </a:p>
+                  </a:txBody>
+                  <a:tcPr>
+                    <a:solidFill>
+                      <a:srgbClr val="FFFFFF"/>
+                    </a:solidFill>
+                  </a:tcPr>
+                </a:tc>
+                <a:tc>
+                  <a:txBody>
+                    <a:bodyPr wrap="none"/>
+                    <a:lstStyle/>
+                    <a:p>
+                      <a:pPr algn="ctr"/>
+                      <a:r>
+                        <a:rPr sz="1000" b="1">
+                          <a:solidFill>
+                            <a:srgbClr val="44546A"/>
+                          </a:solidFill>
+                          <a:latin typeface="DM Sans"/>
+                        </a:rPr>
+                        <a:t>6%</a:t>
+                      </a:r>
+                    </a:p>
+                  </a:txBody>
+                  <a:tcPr>
+                    <a:solidFill>
+                      <a:srgbClr val="FFFFFF"/>
+                    </a:solidFill>
+                  </a:tcPr>
+                </a:tc>
+              </a:tr>
+              <a:tr h="306628">
+                <a:tc>
+                  <a:txBody>
+                    <a:bodyPr wrap="none"/>
+                    <a:lstStyle/>
+                    <a:p>
+                      <a:pPr algn="l"/>
+                      <a:r>
+                        <a:rPr sz="1000" b="0">
+                          <a:solidFill>
+                            <a:srgbClr val="44546A"/>
+                          </a:solidFill>
+                          <a:latin typeface="DM Sans"/>
+                        </a:rPr>
+                        <a:t>Dissatisfaction with politics</a:t>
+                      </a:r>
+                    </a:p>
+                  </a:txBody>
+                  <a:tcPr>
+                    <a:solidFill>
+                      <a:srgbClr val="E6F8F9"/>
+                    </a:solidFill>
+                  </a:tcPr>
+                </a:tc>
+                <a:tc>
+                  <a:txBody>
+                    <a:bodyPr wrap="none"/>
+                    <a:lstStyle/>
+                    <a:p>
+                      <a:pPr algn="ctr"/>
+                      <a:r>
+                        <a:rPr sz="1000" b="1">
+                          <a:solidFill>
+                            <a:srgbClr val="44546A"/>
+                          </a:solidFill>
+                          <a:latin typeface="DM Sans"/>
+                        </a:rPr>
+                        <a:t>5%</a:t>
+                      </a:r>
+                    </a:p>
+                  </a:txBody>
+                  <a:tcPr>
+                    <a:solidFill>
+                      <a:srgbClr val="E6F8F9"/>
+                    </a:solidFill>
+                  </a:tcPr>
+                </a:tc>
+              </a:tr>
+              <a:tr h="306628">
+                <a:tc>
+                  <a:txBody>
+                    <a:bodyPr wrap="none"/>
+                    <a:lstStyle/>
+                    <a:p>
+                      <a:pPr algn="l"/>
+                      <a:r>
+                        <a:rPr sz="1000" b="0">
+                          <a:solidFill>
+                            <a:srgbClr val="44546A"/>
+                          </a:solidFill>
+                          <a:latin typeface="DM Sans"/>
+                        </a:rPr>
+                        <a:t>Certainty for investment</a:t>
+                      </a:r>
+                    </a:p>
+                  </a:txBody>
+                  <a:tcPr>
+                    <a:solidFill>
+                      <a:srgbClr val="FFFFFF"/>
+                    </a:solidFill>
+                  </a:tcPr>
+                </a:tc>
+                <a:tc>
+                  <a:txBody>
+                    <a:bodyPr wrap="none"/>
+                    <a:lstStyle/>
+                    <a:p>
+                      <a:pPr algn="ctr"/>
+                      <a:r>
+                        <a:rPr sz="1000" b="1">
+                          <a:solidFill>
+                            <a:srgbClr val="44546A"/>
+                          </a:solidFill>
+                          <a:latin typeface="DM Sans"/>
+                        </a:rPr>
+                        <a:t>4%</a:t>
+                      </a:r>
+                    </a:p>
+                  </a:txBody>
+                  <a:tcPr>
+                    <a:solidFill>
+                      <a:srgbClr val="FFFFFF"/>
+                    </a:solidFill>
+                  </a:tcPr>
+                </a:tc>
+              </a:tr>
+              <a:tr h="306640">
+                <a:tc>
+                  <a:txBody>
+                    <a:bodyPr wrap="none"/>
+                    <a:lstStyle/>
+                    <a:p>
+                      <a:pPr algn="l"/>
+                      <a:r>
+                        <a:rPr sz="1000" b="0">
+                          <a:solidFill>
+                            <a:srgbClr val="44546A"/>
+                          </a:solidFill>
+                          <a:latin typeface="DM Sans"/>
+                        </a:rPr>
+                        <a:t>Unsure</a:t>
+                      </a:r>
+                    </a:p>
+                  </a:txBody>
+                  <a:tcPr>
+                    <a:solidFill>
+                      <a:srgbClr val="E6F8F9"/>
+                    </a:solidFill>
+                  </a:tcPr>
+                </a:tc>
+                <a:tc>
+                  <a:txBody>
+                    <a:bodyPr wrap="none"/>
+                    <a:lstStyle/>
+                    <a:p>
+                      <a:pPr algn="ctr"/>
+                      <a:r>
+                        <a:rPr sz="1000" b="1">
+                          <a:solidFill>
+                            <a:srgbClr val="44546A"/>
+                          </a:solidFill>
+                          <a:latin typeface="DM Sans"/>
+                        </a:rPr>
+                        <a:t>4%</a:t>
+                      </a:r>
+                    </a:p>
+                  </a:txBody>
+                  <a:tcPr>
+                    <a:solidFill>
+                      <a:srgbClr val="E6F8F9"/>
+                    </a:solidFill>
+                  </a:tcPr>
+                </a:tc>
+              </a:tr>
+            </a:tbl>
+          </a:graphicData>
+        </a:graphic>
+      </p:graphicFrame>
       <p:sp>
         <p:nvSpPr>
           <p:cNvPr id="6" name="TextBox 5"/>
@@ -7077,7 +7798,7 @@
                 </a:solidFill>
                 <a:latin typeface="DM Sans"/>
               </a:rPr>
-              <a:t>Only 1 in 3 non-solar households</a:t>
+              <a:t>Practical momentum and values-based</a:t>
             </a:r>
           </a:p>
           <a:p>
@@ -7088,7 +7809,7 @@
                 </a:solidFill>
                 <a:latin typeface="DM Sans"/>
               </a:rPr>
-              <a:t>are considering solar — 26% unsure.</a:t>
+              <a:t>support are the dominant themes.</a:t>
             </a:r>
           </a:p>
           <a:p>
@@ -7110,40 +7831,40 @@
                 </a:solidFill>
                 <a:latin typeface="DM Sans"/>
               </a:rPr>
-              <a:t>Most likely to consider:</a:t>
+              <a:t>Top reasons:</a:t>
             </a:r>
           </a:p>
           <a:p>
             <a:r>
               <a:rPr sz="1200" b="0">
                 <a:solidFill>
-                  <a:srgbClr val="00BDBB"/>
+                  <a:srgbClr val="44546A"/>
                 </a:solidFill>
                 <a:latin typeface="DM Sans"/>
               </a:rPr>
-              <a:t>  ↑ Mortgage holders — 48%</a:t>
+              <a:t>1. Clear goals &amp; direction — 25%</a:t>
             </a:r>
           </a:p>
           <a:p>
             <a:r>
               <a:rPr sz="1200" b="0">
                 <a:solidFill>
-                  <a:srgbClr val="00BDBB"/>
+                  <a:srgbClr val="44546A"/>
                 </a:solidFill>
                 <a:latin typeface="DM Sans"/>
               </a:rPr>
-              <a:t>  ↑ 30–44 year olds — 42%</a:t>
+              <a:t>2. 'Right thing to do' — 23%</a:t>
             </a:r>
           </a:p>
           <a:p>
             <a:r>
               <a:rPr sz="1200" b="0">
                 <a:solidFill>
-                  <a:srgbClr val="00BDBB"/>
+                  <a:srgbClr val="44546A"/>
                 </a:solidFill>
                 <a:latin typeface="DM Sans"/>
               </a:rPr>
-              <a:t>  ↑ Income &gt;$120k — 42%</a:t>
+              <a:t>3. Better environment &amp; health — 16%</a:t>
             </a:r>
           </a:p>
           <a:p>
@@ -7154,7 +7875,7 @@
                 </a:solidFill>
                 <a:latin typeface="DM Sans"/>
               </a:rPr>
-              <a:t/>
+              <a:t>4. Climate &amp; emissions — 14%</a:t>
             </a:r>
           </a:p>
           <a:p>
@@ -7165,40 +7886,7 @@
                 </a:solidFill>
                 <a:latin typeface="DM Sans"/>
               </a:rPr>
-              <a:t>Least likely:</a:t>
-            </a:r>
-          </a:p>
-          <a:p>
-            <a:r>
-              <a:rPr sz="1200" b="0">
-                <a:solidFill>
-                  <a:srgbClr val="A32015"/>
-                </a:solidFill>
-                <a:latin typeface="DM Sans"/>
-              </a:rPr>
-              <a:t>  ↓ 60+ — 24% (61% say no)</a:t>
-            </a:r>
-          </a:p>
-          <a:p>
-            <a:r>
-              <a:rPr sz="1200" b="0">
-                <a:solidFill>
-                  <a:srgbClr val="A32015"/>
-                </a:solidFill>
-                <a:latin typeface="DM Sans"/>
-              </a:rPr>
-              <a:t>  ↓ Income &lt;$60k — 23%</a:t>
-            </a:r>
-          </a:p>
-          <a:p>
-            <a:r>
-              <a:rPr sz="1200" b="0">
-                <a:solidFill>
-                  <a:srgbClr val="A32015"/>
-                </a:solidFill>
-                <a:latin typeface="DM Sans"/>
-              </a:rPr>
-              <a:t>  ↓ Retired — 21%</a:t>
+              <a:t>5. Reduce fossil fuel reliance — 11%</a:t>
             </a:r>
           </a:p>
         </p:txBody>
@@ -7277,311 +7965,6 @@
                 <a:latin typeface="DM Sans"/>
               </a:rPr>
               <a:t>7</a:t>
-            </a:r>
-          </a:p>
-        </p:txBody>
-      </p:sp>
-    </p:spTree>
-  </p:cSld>
-  <p:clrMapOvr>
-    <a:masterClrMapping/>
-  </p:clrMapOvr>
-</p:sld>
-</file>
-
-<file path=ppt/slides/slide11.xml><?xml version="1.0" encoding="utf-8"?>
-<p:sld xmlns:a="http://schemas.openxmlformats.org/drawingml/2006/main" xmlns:p="http://schemas.openxmlformats.org/presentationml/2006/main" xmlns:r="http://schemas.openxmlformats.org/officeDocument/2006/relationships">
-  <p:cSld>
-    <p:spTree>
-      <p:nvGrpSpPr>
-        <p:cNvPr id="1" name=""/>
-        <p:cNvGrpSpPr/>
-        <p:nvPr/>
-      </p:nvGrpSpPr>
-      <p:grpSpPr/>
-      <p:sp>
-        <p:nvSpPr>
-          <p:cNvPr id="2" name="Text Placeholder 1"/>
-          <p:cNvSpPr>
-            <a:spLocks noGrp="1"/>
-          </p:cNvSpPr>
-          <p:nvPr>
-            <p:ph type="body" idx="22" sz="quarter"/>
-          </p:nvPr>
-        </p:nvSpPr>
-        <p:spPr/>
-        <p:txBody>
-          <a:bodyPr/>
-          <a:lstStyle/>
-          <a:p>
-            <a:r>
-              <a:t>Base: those who support a target (n=626)</a:t>
-            </a:r>
-          </a:p>
-        </p:txBody>
-      </p:sp>
-      <p:sp>
-        <p:nvSpPr>
-          <p:cNvPr id="3" name="Title 2"/>
-          <p:cNvSpPr>
-            <a:spLocks noGrp="1"/>
-          </p:cNvSpPr>
-          <p:nvPr>
-            <p:ph type="title"/>
-          </p:nvPr>
-        </p:nvSpPr>
-        <p:spPr/>
-        <p:txBody>
-          <a:bodyPr/>
-          <a:lstStyle/>
-          <a:p>
-            <a:r>
-              <a:t>Main reason for supporting a renewable energy target</a:t>
-            </a:r>
-          </a:p>
-        </p:txBody>
-      </p:sp>
-      <p:sp>
-        <p:nvSpPr>
-          <p:cNvPr id="4" name="Text Placeholder 3"/>
-          <p:cNvSpPr>
-            <a:spLocks noGrp="1"/>
-          </p:cNvSpPr>
-          <p:nvPr>
-            <p:ph type="body" idx="21" sz="quarter"/>
-          </p:nvPr>
-        </p:nvSpPr>
-        <p:spPr/>
-        <p:txBody>
-          <a:bodyPr/>
-          <a:lstStyle/>
-          <a:p>
-            <a:r>
-              <a:t>What is the main reason for supporting a target? (%, among supporters)</a:t>
-            </a:r>
-          </a:p>
-        </p:txBody>
-      </p:sp>
-      <p:pic>
-        <p:nvPicPr>
-          <p:cNvPr id="5" name="Picture 4" descr="image.png"/>
-          <p:cNvPicPr>
-            <a:picLocks noChangeAspect="1"/>
-          </p:cNvPicPr>
-          <p:nvPr/>
-        </p:nvPicPr>
-        <p:blipFill>
-          <a:blip r:embed="rId2"/>
-          <a:stretch>
-            <a:fillRect/>
-          </a:stretch>
-        </p:blipFill>
-        <p:spPr>
-          <a:xfrm>
-            <a:off x="310896" y="1709928"/>
-            <a:ext cx="5303520" cy="4754880"/>
-          </a:xfrm>
-          <a:prstGeom prst="rect">
-            <a:avLst/>
-          </a:prstGeom>
-        </p:spPr>
-      </p:pic>
-      <p:sp>
-        <p:nvSpPr>
-          <p:cNvPr id="6" name="TextBox 5"/>
-          <p:cNvSpPr txBox="1"/>
-          <p:nvPr/>
-        </p:nvSpPr>
-        <p:spPr>
-          <a:xfrm>
-            <a:off x="7379208" y="1709928"/>
-            <a:ext cx="4453128" cy="4754880"/>
-          </a:xfrm>
-          <a:prstGeom prst="rect">
-            <a:avLst/>
-          </a:prstGeom>
-          <a:noFill/>
-        </p:spPr>
-        <p:txBody>
-          <a:bodyPr wrap="square">
-            <a:spAutoFit/>
-          </a:bodyPr>
-          <a:lstStyle/>
-          <a:p>
-            <a:r>
-              <a:rPr sz="1200" b="0">
-                <a:solidFill>
-                  <a:srgbClr val="44546A"/>
-                </a:solidFill>
-                <a:latin typeface="DM Sans"/>
-              </a:rPr>
-              <a:t>Practical momentum and values-based</a:t>
-            </a:r>
-          </a:p>
-          <a:p>
-            <a:r>
-              <a:rPr sz="1200" b="0">
-                <a:solidFill>
-                  <a:srgbClr val="44546A"/>
-                </a:solidFill>
-                <a:latin typeface="DM Sans"/>
-              </a:rPr>
-              <a:t>support are the dominant themes.</a:t>
-            </a:r>
-          </a:p>
-          <a:p>
-            <a:r>
-              <a:rPr sz="1200" b="0">
-                <a:solidFill>
-                  <a:srgbClr val="44546A"/>
-                </a:solidFill>
-                <a:latin typeface="DM Sans"/>
-              </a:rPr>
-              <a:t/>
-            </a:r>
-          </a:p>
-          <a:p>
-            <a:r>
-              <a:rPr sz="1200" b="0">
-                <a:solidFill>
-                  <a:srgbClr val="44546A"/>
-                </a:solidFill>
-                <a:latin typeface="DM Sans"/>
-              </a:rPr>
-              <a:t>Top reasons:</a:t>
-            </a:r>
-          </a:p>
-          <a:p>
-            <a:r>
-              <a:rPr sz="1200" b="0">
-                <a:solidFill>
-                  <a:srgbClr val="44546A"/>
-                </a:solidFill>
-                <a:latin typeface="DM Sans"/>
-              </a:rPr>
-              <a:t>1. Clear goals &amp; direction — 25%</a:t>
-            </a:r>
-          </a:p>
-          <a:p>
-            <a:r>
-              <a:rPr sz="1200" b="0">
-                <a:solidFill>
-                  <a:srgbClr val="44546A"/>
-                </a:solidFill>
-                <a:latin typeface="DM Sans"/>
-              </a:rPr>
-              <a:t>2. 'Right thing to do' — 23%</a:t>
-            </a:r>
-          </a:p>
-          <a:p>
-            <a:r>
-              <a:rPr sz="1200" b="0">
-                <a:solidFill>
-                  <a:srgbClr val="44546A"/>
-                </a:solidFill>
-                <a:latin typeface="DM Sans"/>
-              </a:rPr>
-              <a:t>3. Better environment &amp; health — 16%</a:t>
-            </a:r>
-          </a:p>
-          <a:p>
-            <a:r>
-              <a:rPr sz="1200" b="0">
-                <a:solidFill>
-                  <a:srgbClr val="44546A"/>
-                </a:solidFill>
-                <a:latin typeface="DM Sans"/>
-              </a:rPr>
-              <a:t>4. Climate &amp; emissions — 14%</a:t>
-            </a:r>
-          </a:p>
-          <a:p>
-            <a:r>
-              <a:rPr sz="1200" b="0">
-                <a:solidFill>
-                  <a:srgbClr val="44546A"/>
-                </a:solidFill>
-                <a:latin typeface="DM Sans"/>
-              </a:rPr>
-              <a:t>5. Reduce fossil fuel reliance — 11%</a:t>
-            </a:r>
-          </a:p>
-        </p:txBody>
-      </p:sp>
-      <p:sp>
-        <p:nvSpPr>
-          <p:cNvPr id="7" name="Oval 6"/>
-          <p:cNvSpPr/>
-          <p:nvPr/>
-        </p:nvSpPr>
-        <p:spPr>
-          <a:xfrm>
-            <a:off x="11548872" y="6217920"/>
-            <a:ext cx="274320" cy="274320"/>
-          </a:xfrm>
-          <a:prstGeom prst="ellipse">
-            <a:avLst/>
-          </a:prstGeom>
-          <a:solidFill>
-            <a:srgbClr val="027F7C"/>
-          </a:solidFill>
-          <a:ln>
-            <a:noFill/>
-          </a:ln>
-        </p:spPr>
-        <p:style>
-          <a:lnRef idx="1">
-            <a:schemeClr val="accent1"/>
-          </a:lnRef>
-          <a:fillRef idx="3">
-            <a:schemeClr val="accent1"/>
-          </a:fillRef>
-          <a:effectRef idx="2">
-            <a:schemeClr val="accent1"/>
-          </a:effectRef>
-          <a:fontRef idx="minor">
-            <a:schemeClr val="lt1"/>
-          </a:fontRef>
-        </p:style>
-        <p:txBody>
-          <a:bodyPr rtlCol="0" anchor="ctr"/>
-          <a:lstStyle/>
-          <a:p>
-            <a:pPr algn="ctr"/>
-          </a:p>
-        </p:txBody>
-      </p:sp>
-      <p:sp>
-        <p:nvSpPr>
-          <p:cNvPr id="8" name="TextBox 7"/>
-          <p:cNvSpPr txBox="1"/>
-          <p:nvPr/>
-        </p:nvSpPr>
-        <p:spPr>
-          <a:xfrm>
-            <a:off x="11548872" y="6250838"/>
-            <a:ext cx="274320" cy="208483"/>
-          </a:xfrm>
-          <a:prstGeom prst="rect">
-            <a:avLst/>
-          </a:prstGeom>
-          <a:noFill/>
-        </p:spPr>
-        <p:txBody>
-          <a:bodyPr wrap="square">
-            <a:spAutoFit/>
-          </a:bodyPr>
-          <a:lstStyle/>
-          <a:p>
-            <a:pPr algn="ctr"/>
-            <a:r>
-              <a:rPr sz="1000" b="1" i="0">
-                <a:solidFill>
-                  <a:srgbClr val="FFFFFF"/>
-                </a:solidFill>
-                <a:latin typeface="DM Sans"/>
-              </a:rPr>
-              <a:t>8</a:t>
             </a:r>
           </a:p>
         </p:txBody>
@@ -8776,7 +9159,7 @@
           <a:lstStyle/>
           <a:p>
             <a:r>
-              <a:t>Likely outcomes of more renewable energy (1 of 2)</a:t>
+              <a:t>Likely outcomes of more renewable energy</a:t>
             </a:r>
           </a:p>
         </p:txBody>
@@ -8839,8 +9222,8 @@
         </p:blipFill>
         <p:spPr>
           <a:xfrm>
-            <a:off x="310896" y="2130552"/>
-            <a:ext cx="8229600" cy="3794760"/>
+            <a:off x="310896" y="2061972"/>
+            <a:ext cx="8229600" cy="3931920"/>
           </a:xfrm>
           <a:prstGeom prst="rect">
             <a:avLst/>
@@ -8855,8 +9238,8 @@
         </p:nvSpPr>
         <p:spPr>
           <a:xfrm>
-            <a:off x="8686800" y="2130552"/>
-            <a:ext cx="3136391" cy="3794760"/>
+            <a:off x="8686800" y="2061972"/>
+            <a:ext cx="3136391" cy="3931920"/>
           </a:xfrm>
           <a:prstGeom prst="rect">
             <a:avLst/>
@@ -8870,7 +9253,7 @@
           <a:lstStyle/>
           <a:p>
             <a:r>
-              <a:rPr sz="1100" b="0">
+              <a:rPr sz="1000" b="0">
                 <a:solidFill>
                   <a:srgbClr val="44546A"/>
                 </a:solidFill>
@@ -8881,7 +9264,7 @@
           </a:p>
           <a:p>
             <a:r>
-              <a:rPr sz="1100" b="0">
+              <a:rPr sz="1000" b="0">
                 <a:solidFill>
                   <a:srgbClr val="44546A"/>
                 </a:solidFill>
@@ -8892,7 +9275,7 @@
           </a:p>
           <a:p>
             <a:r>
-              <a:rPr sz="1100" b="0">
+              <a:rPr sz="1000" b="0">
                 <a:solidFill>
                   <a:srgbClr val="44546A"/>
                 </a:solidFill>
@@ -8903,18 +9286,40 @@
           </a:p>
           <a:p>
             <a:r>
-              <a:rPr sz="1100" b="0">
+              <a:rPr sz="1000" b="0">
                 <a:solidFill>
                   <a:srgbClr val="44546A"/>
                 </a:solidFill>
                 <a:latin typeface="DM Sans"/>
               </a:rPr>
-              <a:t>Strongest optimism among 30–44 year olds:</a:t>
-            </a:r>
-          </a:p>
-          <a:p>
-            <a:r>
-              <a:rPr sz="1100" b="0">
+              <a:t>Best outcomes: jobs, industries,</a:t>
+            </a:r>
+          </a:p>
+          <a:p>
+            <a:r>
+              <a:rPr sz="1000" b="0">
+                <a:solidFill>
+                  <a:srgbClr val="44546A"/>
+                </a:solidFill>
+                <a:latin typeface="DM Sans"/>
+              </a:rPr>
+              <a:t>infrastructure, environment (70–73%).</a:t>
+            </a:r>
+          </a:p>
+          <a:p>
+            <a:r>
+              <a:rPr sz="1000" b="0">
+                <a:solidFill>
+                  <a:srgbClr val="44546A"/>
+                </a:solidFill>
+                <a:latin typeface="DM Sans"/>
+              </a:rPr>
+              <a:t/>
+            </a:r>
+          </a:p>
+          <a:p>
+            <a:r>
+              <a:rPr sz="1000" b="0">
                 <a:solidFill>
                   <a:srgbClr val="00BDBB"/>
                 </a:solidFill>
@@ -8925,18 +9330,18 @@
           </a:p>
           <a:p>
             <a:r>
-              <a:rPr sz="1100" b="0">
+              <a:rPr sz="1000" b="0">
                 <a:solidFill>
                   <a:srgbClr val="A32015"/>
                 </a:solidFill>
                 <a:latin typeface="DM Sans"/>
               </a:rPr>
-              <a:t>  ↓ 60+ — 57–68% total likely</a:t>
-            </a:r>
-          </a:p>
-          <a:p>
-            <a:r>
-              <a:rPr sz="1100" b="0">
+              <a:t>  ↓ 60+ — 55–68% total likely</a:t>
+            </a:r>
+          </a:p>
+          <a:p>
+            <a:r>
+              <a:rPr sz="1000" b="0">
                 <a:solidFill>
                   <a:srgbClr val="44546A"/>
                 </a:solidFill>
@@ -8947,35 +9352,46 @@
           </a:p>
           <a:p>
             <a:r>
-              <a:rPr sz="1100" b="0">
+              <a:rPr sz="1000" b="0">
                 <a:solidFill>
                   <a:srgbClr val="44546A"/>
                 </a:solidFill>
                 <a:latin typeface="DM Sans"/>
               </a:rPr>
-              <a:t>Solar/battery owners more optimistic:</a:t>
-            </a:r>
-          </a:p>
-          <a:p>
-            <a:r>
-              <a:rPr sz="1100" b="0">
-                <a:solidFill>
-                  <a:srgbClr val="00BDBB"/>
+              <a:t>Power prices &amp; cost of living attract</a:t>
+            </a:r>
+          </a:p>
+          <a:p>
+            <a:r>
+              <a:rPr sz="1000" b="0">
+                <a:solidFill>
+                  <a:srgbClr val="44546A"/>
                 </a:solidFill>
                 <a:latin typeface="DM Sans"/>
               </a:rPr>
-              <a:t>  ↑ Solar owners — ~75–79%</a:t>
-            </a:r>
-          </a:p>
-          <a:p>
-            <a:r>
-              <a:rPr sz="1100" b="0">
-                <a:solidFill>
-                  <a:srgbClr val="A32015"/>
+              <a:t>most scepticism (57–59%).</a:t>
+            </a:r>
+          </a:p>
+          <a:p>
+            <a:r>
+              <a:rPr sz="1000" b="0">
+                <a:solidFill>
+                  <a:srgbClr val="00BDBB"/>
                 </a:solidFill>
                 <a:latin typeface="DM Sans"/>
               </a:rPr>
-              <a:t>  ↓ No solar — ~56–66%</a:t>
+              <a:t>  ↑ WA Labor — 65–67% likely</a:t>
+            </a:r>
+          </a:p>
+          <a:p>
+            <a:r>
+              <a:rPr sz="1000" b="0">
+                <a:solidFill>
+                  <a:srgbClr val="A32015"/>
+                </a:solidFill>
+                <a:latin typeface="DM Sans"/>
+              </a:rPr>
+              <a:t>  ↓ One Nation — 29–40% likely</a:t>
             </a:r>
           </a:p>
         </p:txBody>
@@ -9078,7 +9494,28 @@
       <p:grpSpPr/>
       <p:sp>
         <p:nvSpPr>
-          <p:cNvPr id="2" name="Title 1"/>
+          <p:cNvPr id="2" name="Text Placeholder 1"/>
+          <p:cNvSpPr>
+            <a:spLocks noGrp="1"/>
+          </p:cNvSpPr>
+          <p:nvPr>
+            <p:ph type="body" idx="22" sz="quarter"/>
+          </p:nvPr>
+        </p:nvSpPr>
+        <p:spPr/>
+        <p:txBody>
+          <a:bodyPr/>
+          <a:lstStyle/>
+          <a:p>
+            <a:r>
+              <a:t>Base: all respondents (n=1,011)</a:t>
+            </a:r>
+          </a:p>
+        </p:txBody>
+      </p:sp>
+      <p:sp>
+        <p:nvSpPr>
+          <p:cNvPr id="3" name="Title 2"/>
           <p:cNvSpPr>
             <a:spLocks noGrp="1"/>
           </p:cNvSpPr>
@@ -9092,14 +9529,14 @@
           <a:lstStyle/>
           <a:p>
             <a:r>
-              <a:t>Likely outcomes of more renewable energy (2 of 2)</a:t>
-            </a:r>
-          </a:p>
-        </p:txBody>
-      </p:sp>
-      <p:sp>
-        <p:nvSpPr>
-          <p:cNvPr id="3" name="Text Placeholder 2"/>
+              <a:t>Support for a WA renewable energy target</a:t>
+            </a:r>
+          </a:p>
+        </p:txBody>
+      </p:sp>
+      <p:sp>
+        <p:nvSpPr>
+          <p:cNvPr id="4" name="Text Placeholder 3"/>
           <p:cNvSpPr>
             <a:spLocks noGrp="1"/>
           </p:cNvSpPr>
@@ -9113,28 +9550,7 @@
           <a:lstStyle/>
           <a:p>
             <a:r>
-              <a:t>How likely do you think these outcomes would be if WA used more renewable energy? (%)</a:t>
-            </a:r>
-          </a:p>
-        </p:txBody>
-      </p:sp>
-      <p:sp>
-        <p:nvSpPr>
-          <p:cNvPr id="4" name="Text Placeholder 3"/>
-          <p:cNvSpPr>
-            <a:spLocks noGrp="1"/>
-          </p:cNvSpPr>
-          <p:nvPr>
-            <p:ph type="body" idx="22" sz="quarter"/>
-          </p:nvPr>
-        </p:nvSpPr>
-        <p:spPr/>
-        <p:txBody>
-          <a:bodyPr/>
-          <a:lstStyle/>
-          <a:p>
-            <a:r>
-              <a:t>Base: all respondents (n=1,011)</a:t>
+              <a:t>How strongly do you support or oppose WA adopting a renewable energy target? (%)</a:t>
             </a:r>
           </a:p>
         </p:txBody>
@@ -9155,8 +9571,8 @@
         </p:blipFill>
         <p:spPr>
           <a:xfrm>
-            <a:off x="310896" y="2130552"/>
-            <a:ext cx="8229600" cy="3794760"/>
+            <a:off x="310896" y="1709928"/>
+            <a:ext cx="5303520" cy="4251960"/>
           </a:xfrm>
           <a:prstGeom prst="rect">
             <a:avLst/>
@@ -9165,164 +9581,20 @@
       </p:pic>
       <p:sp>
         <p:nvSpPr>
-          <p:cNvPr id="6" name="TextBox 5"/>
-          <p:cNvSpPr txBox="1"/>
-          <p:nvPr/>
-        </p:nvSpPr>
-        <p:spPr>
-          <a:xfrm>
-            <a:off x="8686800" y="2130552"/>
-            <a:ext cx="3136391" cy="3794760"/>
-          </a:xfrm>
-          <a:prstGeom prst="rect">
-            <a:avLst/>
-          </a:prstGeom>
-          <a:noFill/>
-        </p:spPr>
-        <p:txBody>
-          <a:bodyPr wrap="square">
-            <a:spAutoFit/>
-          </a:bodyPr>
-          <a:lstStyle/>
-          <a:p>
-            <a:r>
-              <a:rPr sz="1100" b="0">
-                <a:solidFill>
-                  <a:srgbClr val="44546A"/>
-                </a:solidFill>
-                <a:latin typeface="DM Sans"/>
-              </a:rPr>
-              <a:t>Power prices &amp; cost of living attract</a:t>
-            </a:r>
-          </a:p>
-          <a:p>
-            <a:r>
-              <a:rPr sz="1100" b="0">
-                <a:solidFill>
-                  <a:srgbClr val="44546A"/>
-                </a:solidFill>
-                <a:latin typeface="DM Sans"/>
-              </a:rPr>
-              <a:t>greatest scepticism — but still majority</a:t>
-            </a:r>
-          </a:p>
-          <a:p>
-            <a:r>
-              <a:rPr sz="1100" b="0">
-                <a:solidFill>
-                  <a:srgbClr val="44546A"/>
-                </a:solidFill>
-                <a:latin typeface="DM Sans"/>
-              </a:rPr>
-              <a:t>optimism (57–59% total likely).</a:t>
-            </a:r>
-          </a:p>
-          <a:p>
-            <a:r>
-              <a:rPr sz="1100" b="0">
-                <a:solidFill>
-                  <a:srgbClr val="44546A"/>
-                </a:solidFill>
-                <a:latin typeface="DM Sans"/>
-              </a:rPr>
-              <a:t/>
-            </a:r>
-          </a:p>
-          <a:p>
-            <a:r>
-              <a:rPr sz="1100" b="0">
-                <a:solidFill>
-                  <a:srgbClr val="44546A"/>
-                </a:solidFill>
-                <a:latin typeface="DM Sans"/>
-              </a:rPr>
-              <a:t>Political vote is the strongest divider:</a:t>
-            </a:r>
-          </a:p>
-          <a:p>
-            <a:r>
-              <a:rPr sz="1100" b="0">
-                <a:solidFill>
-                  <a:srgbClr val="00BDBB"/>
-                </a:solidFill>
-                <a:latin typeface="DM Sans"/>
-              </a:rPr>
-              <a:t>  ↑ WA Labor — 65–67% likely</a:t>
-            </a:r>
-          </a:p>
-          <a:p>
-            <a:r>
-              <a:rPr sz="1100" b="0">
-                <a:solidFill>
-                  <a:srgbClr val="A32015"/>
-                </a:solidFill>
-                <a:latin typeface="DM Sans"/>
-              </a:rPr>
-              <a:t>  ↓ One Nation — 29–40% likely</a:t>
-            </a:r>
-          </a:p>
-          <a:p>
-            <a:r>
-              <a:rPr sz="1100" b="0">
-                <a:solidFill>
-                  <a:srgbClr val="44546A"/>
-                </a:solidFill>
-                <a:latin typeface="DM Sans"/>
-              </a:rPr>
-              <a:t/>
-            </a:r>
-          </a:p>
-          <a:p>
-            <a:r>
-              <a:rPr sz="1100" b="0">
-                <a:solidFill>
-                  <a:srgbClr val="44546A"/>
-                </a:solidFill>
-                <a:latin typeface="DM Sans"/>
-              </a:rPr>
-              <a:t>Education gradient:</a:t>
-            </a:r>
-          </a:p>
-          <a:p>
-            <a:r>
-              <a:rPr sz="1100" b="0">
-                <a:solidFill>
-                  <a:srgbClr val="00BDBB"/>
-                </a:solidFill>
-                <a:latin typeface="DM Sans"/>
-              </a:rPr>
-              <a:t>  ↑ University — 62–68% likely</a:t>
-            </a:r>
-          </a:p>
-          <a:p>
-            <a:r>
-              <a:rPr sz="1100" b="0">
-                <a:solidFill>
-                  <a:srgbClr val="A32015"/>
-                </a:solidFill>
-                <a:latin typeface="DM Sans"/>
-              </a:rPr>
-              <a:t>  ↓ Secondary/lower — 48–52% likely</a:t>
-            </a:r>
-          </a:p>
-        </p:txBody>
-      </p:sp>
-      <p:sp>
-        <p:nvSpPr>
-          <p:cNvPr id="7" name="Oval 6"/>
+          <p:cNvPr id="6" name="Oval 5"/>
           <p:cNvSpPr/>
           <p:nvPr/>
         </p:nvSpPr>
         <p:spPr>
           <a:xfrm>
-            <a:off x="11548872" y="6217920"/>
-            <a:ext cx="274320" cy="274320"/>
+            <a:off x="4667128" y="2305882"/>
+            <a:ext cx="798007" cy="798007"/>
           </a:xfrm>
           <a:prstGeom prst="ellipse">
             <a:avLst/>
           </a:prstGeom>
           <a:solidFill>
-            <a:srgbClr val="027F7C"/>
+            <a:srgbClr val="00BDBB"/>
           </a:solidFill>
           <a:ln>
             <a:noFill/>
@@ -9352,7 +9624,406 @@
       </p:sp>
       <p:sp>
         <p:nvSpPr>
+          <p:cNvPr id="7" name="TextBox 6"/>
+          <p:cNvSpPr txBox="1"/>
+          <p:nvPr/>
+        </p:nvSpPr>
+        <p:spPr>
+          <a:xfrm>
+            <a:off x="4667128" y="2353763"/>
+            <a:ext cx="798007" cy="414964"/>
+          </a:xfrm>
+          <a:prstGeom prst="rect">
+            <a:avLst/>
+          </a:prstGeom>
+          <a:noFill/>
+        </p:spPr>
+        <p:txBody>
+          <a:bodyPr wrap="none">
+            <a:spAutoFit/>
+          </a:bodyPr>
+          <a:lstStyle/>
+          <a:p>
+            <a:pPr algn="ctr"/>
+            <a:r>
+              <a:rPr sz="2700" b="1">
+                <a:solidFill>
+                  <a:srgbClr val="FFFFFF"/>
+                </a:solidFill>
+                <a:latin typeface="DM Sans"/>
+              </a:rPr>
+              <a:t>62</a:t>
+            </a:r>
+            <a:r>
+              <a:rPr sz="1700" b="1">
+                <a:solidFill>
+                  <a:srgbClr val="FFFFFF"/>
+                </a:solidFill>
+                <a:latin typeface="DM Sans"/>
+              </a:rPr>
+              <a:t>%</a:t>
+            </a:r>
+          </a:p>
+        </p:txBody>
+      </p:sp>
+      <p:sp>
+        <p:nvSpPr>
           <p:cNvPr id="8" name="TextBox 7"/>
+          <p:cNvSpPr txBox="1"/>
+          <p:nvPr/>
+        </p:nvSpPr>
+        <p:spPr>
+          <a:xfrm>
+            <a:off x="4667128" y="2752767"/>
+            <a:ext cx="798007" cy="303242"/>
+          </a:xfrm>
+          <a:prstGeom prst="rect">
+            <a:avLst/>
+          </a:prstGeom>
+          <a:noFill/>
+        </p:spPr>
+        <p:txBody>
+          <a:bodyPr wrap="square">
+            <a:spAutoFit/>
+          </a:bodyPr>
+          <a:lstStyle/>
+          <a:p>
+            <a:pPr algn="ctr"/>
+            <a:r>
+              <a:rPr sz="1300" b="0" i="0">
+                <a:solidFill>
+                  <a:srgbClr val="FFFFFF"/>
+                </a:solidFill>
+                <a:latin typeface="DM Sans"/>
+              </a:rPr>
+              <a:t>Support</a:t>
+            </a:r>
+          </a:p>
+        </p:txBody>
+      </p:sp>
+      <p:sp>
+        <p:nvSpPr>
+          <p:cNvPr id="9" name="Oval 8"/>
+          <p:cNvSpPr/>
+          <p:nvPr/>
+        </p:nvSpPr>
+        <p:spPr>
+          <a:xfrm>
+            <a:off x="2955436" y="3910504"/>
+            <a:ext cx="718207" cy="718207"/>
+          </a:xfrm>
+          <a:prstGeom prst="ellipse">
+            <a:avLst/>
+          </a:prstGeom>
+          <a:solidFill>
+            <a:srgbClr val="A32015"/>
+          </a:solidFill>
+          <a:ln>
+            <a:noFill/>
+          </a:ln>
+        </p:spPr>
+        <p:style>
+          <a:lnRef idx="1">
+            <a:schemeClr val="accent1"/>
+          </a:lnRef>
+          <a:fillRef idx="3">
+            <a:schemeClr val="accent1"/>
+          </a:fillRef>
+          <a:effectRef idx="2">
+            <a:schemeClr val="accent1"/>
+          </a:effectRef>
+          <a:fontRef idx="minor">
+            <a:schemeClr val="lt1"/>
+          </a:fontRef>
+        </p:style>
+        <p:txBody>
+          <a:bodyPr rtlCol="0" anchor="ctr"/>
+          <a:lstStyle/>
+          <a:p>
+            <a:pPr algn="ctr"/>
+          </a:p>
+        </p:txBody>
+      </p:sp>
+      <p:sp>
+        <p:nvSpPr>
+          <p:cNvPr id="10" name="TextBox 9"/>
+          <p:cNvSpPr txBox="1"/>
+          <p:nvPr/>
+        </p:nvSpPr>
+        <p:spPr>
+          <a:xfrm>
+            <a:off x="2955436" y="3953596"/>
+            <a:ext cx="718207" cy="373467"/>
+          </a:xfrm>
+          <a:prstGeom prst="rect">
+            <a:avLst/>
+          </a:prstGeom>
+          <a:noFill/>
+        </p:spPr>
+        <p:txBody>
+          <a:bodyPr wrap="none">
+            <a:spAutoFit/>
+          </a:bodyPr>
+          <a:lstStyle/>
+          <a:p>
+            <a:pPr algn="ctr"/>
+            <a:r>
+              <a:rPr sz="2400" b="1">
+                <a:solidFill>
+                  <a:srgbClr val="FFFFFF"/>
+                </a:solidFill>
+                <a:latin typeface="DM Sans"/>
+              </a:rPr>
+              <a:t>15</a:t>
+            </a:r>
+            <a:r>
+              <a:rPr sz="1500" b="1">
+                <a:solidFill>
+                  <a:srgbClr val="FFFFFF"/>
+                </a:solidFill>
+                <a:latin typeface="DM Sans"/>
+              </a:rPr>
+              <a:t>%</a:t>
+            </a:r>
+          </a:p>
+        </p:txBody>
+      </p:sp>
+      <p:sp>
+        <p:nvSpPr>
+          <p:cNvPr id="11" name="TextBox 10"/>
+          <p:cNvSpPr txBox="1"/>
+          <p:nvPr/>
+        </p:nvSpPr>
+        <p:spPr>
+          <a:xfrm>
+            <a:off x="2955436" y="4312700"/>
+            <a:ext cx="718207" cy="272918"/>
+          </a:xfrm>
+          <a:prstGeom prst="rect">
+            <a:avLst/>
+          </a:prstGeom>
+          <a:noFill/>
+        </p:spPr>
+        <p:txBody>
+          <a:bodyPr wrap="square">
+            <a:spAutoFit/>
+          </a:bodyPr>
+          <a:lstStyle/>
+          <a:p>
+            <a:pPr algn="ctr"/>
+            <a:r>
+              <a:rPr sz="1200" b="0" i="0">
+                <a:solidFill>
+                  <a:srgbClr val="FFFFFF"/>
+                </a:solidFill>
+                <a:latin typeface="DM Sans"/>
+              </a:rPr>
+              <a:t>Oppose</a:t>
+            </a:r>
+          </a:p>
+        </p:txBody>
+      </p:sp>
+      <p:sp>
+        <p:nvSpPr>
+          <p:cNvPr id="12" name="TextBox 11"/>
+          <p:cNvSpPr txBox="1"/>
+          <p:nvPr/>
+        </p:nvSpPr>
+        <p:spPr>
+          <a:xfrm>
+            <a:off x="7379208" y="1709928"/>
+            <a:ext cx="4453128" cy="4251960"/>
+          </a:xfrm>
+          <a:prstGeom prst="rect">
+            <a:avLst/>
+          </a:prstGeom>
+          <a:noFill/>
+        </p:spPr>
+        <p:txBody>
+          <a:bodyPr wrap="square">
+            <a:spAutoFit/>
+          </a:bodyPr>
+          <a:lstStyle/>
+          <a:p>
+            <a:r>
+              <a:rPr sz="1200" b="0">
+                <a:solidFill>
+                  <a:srgbClr val="44546A"/>
+                </a:solidFill>
+                <a:latin typeface="DM Sans"/>
+              </a:rPr>
+              <a:t>62% support a renewable energy target;</a:t>
+            </a:r>
+          </a:p>
+          <a:p>
+            <a:r>
+              <a:rPr sz="1200" b="0">
+                <a:solidFill>
+                  <a:srgbClr val="44546A"/>
+                </a:solidFill>
+                <a:latin typeface="DM Sans"/>
+              </a:rPr>
+              <a:t>only 15% oppose.</a:t>
+            </a:r>
+          </a:p>
+          <a:p>
+            <a:r>
+              <a:rPr sz="1200" b="0">
+                <a:solidFill>
+                  <a:srgbClr val="44546A"/>
+                </a:solidFill>
+                <a:latin typeface="DM Sans"/>
+              </a:rPr>
+              <a:t/>
+            </a:r>
+          </a:p>
+          <a:p>
+            <a:r>
+              <a:rPr sz="1200" b="0">
+                <a:solidFill>
+                  <a:srgbClr val="44546A"/>
+                </a:solidFill>
+                <a:latin typeface="DM Sans"/>
+              </a:rPr>
+              <a:t>Strongest support among:</a:t>
+            </a:r>
+          </a:p>
+          <a:p>
+            <a:r>
+              <a:rPr sz="1200" b="0">
+                <a:solidFill>
+                  <a:srgbClr val="00BDBB"/>
+                </a:solidFill>
+                <a:latin typeface="DM Sans"/>
+              </a:rPr>
+              <a:t>  ↑ WA Labor voters — 78%</a:t>
+            </a:r>
+          </a:p>
+          <a:p>
+            <a:r>
+              <a:rPr sz="1200" b="0">
+                <a:solidFill>
+                  <a:srgbClr val="00BDBB"/>
+                </a:solidFill>
+                <a:latin typeface="DM Sans"/>
+              </a:rPr>
+              <a:t>  ↑ Inner city Perth — 70%</a:t>
+            </a:r>
+          </a:p>
+          <a:p>
+            <a:r>
+              <a:rPr sz="1200" b="0">
+                <a:solidFill>
+                  <a:srgbClr val="00BDBB"/>
+                </a:solidFill>
+                <a:latin typeface="DM Sans"/>
+              </a:rPr>
+              <a:t>  ↑ 30–44 year olds — 66%</a:t>
+            </a:r>
+          </a:p>
+          <a:p>
+            <a:r>
+              <a:rPr sz="1200" b="0">
+                <a:solidFill>
+                  <a:srgbClr val="00BDBB"/>
+                </a:solidFill>
+                <a:latin typeface="DM Sans"/>
+              </a:rPr>
+              <a:t>  ↑ Solar owners — 70%</a:t>
+            </a:r>
+          </a:p>
+          <a:p>
+            <a:r>
+              <a:rPr sz="1200" b="0">
+                <a:solidFill>
+                  <a:srgbClr val="44546A"/>
+                </a:solidFill>
+                <a:latin typeface="DM Sans"/>
+              </a:rPr>
+              <a:t/>
+            </a:r>
+          </a:p>
+          <a:p>
+            <a:r>
+              <a:rPr sz="1200" b="0">
+                <a:solidFill>
+                  <a:srgbClr val="44546A"/>
+                </a:solidFill>
+                <a:latin typeface="DM Sans"/>
+              </a:rPr>
+              <a:t>Most opposition from:</a:t>
+            </a:r>
+          </a:p>
+          <a:p>
+            <a:r>
+              <a:rPr sz="1200" b="0">
+                <a:solidFill>
+                  <a:srgbClr val="A32015"/>
+                </a:solidFill>
+                <a:latin typeface="DM Sans"/>
+              </a:rPr>
+              <a:t>  ↓ One Nation — 35% support, 46% oppose</a:t>
+            </a:r>
+          </a:p>
+          <a:p>
+            <a:r>
+              <a:rPr sz="1200" b="0">
+                <a:solidFill>
+                  <a:srgbClr val="A32015"/>
+                </a:solidFill>
+                <a:latin typeface="DM Sans"/>
+              </a:rPr>
+              <a:t>  ↓ 60+ — 56% support, 25% oppose</a:t>
+            </a:r>
+          </a:p>
+        </p:txBody>
+      </p:sp>
+      <p:sp>
+        <p:nvSpPr>
+          <p:cNvPr id="13" name="Oval 12"/>
+          <p:cNvSpPr/>
+          <p:nvPr/>
+        </p:nvSpPr>
+        <p:spPr>
+          <a:xfrm>
+            <a:off x="11548872" y="6217920"/>
+            <a:ext cx="274320" cy="274320"/>
+          </a:xfrm>
+          <a:prstGeom prst="ellipse">
+            <a:avLst/>
+          </a:prstGeom>
+          <a:solidFill>
+            <a:srgbClr val="027F7C"/>
+          </a:solidFill>
+          <a:ln>
+            <a:noFill/>
+          </a:ln>
+        </p:spPr>
+        <p:style>
+          <a:lnRef idx="1">
+            <a:schemeClr val="accent1"/>
+          </a:lnRef>
+          <a:fillRef idx="3">
+            <a:schemeClr val="accent1"/>
+          </a:fillRef>
+          <a:effectRef idx="2">
+            <a:schemeClr val="accent1"/>
+          </a:effectRef>
+          <a:fontRef idx="minor">
+            <a:schemeClr val="lt1"/>
+          </a:fontRef>
+        </p:style>
+        <p:txBody>
+          <a:bodyPr rtlCol="0" anchor="ctr"/>
+          <a:lstStyle/>
+          <a:p>
+            <a:pPr algn="ctr"/>
+          </a:p>
+        </p:txBody>
+      </p:sp>
+      <p:sp>
+        <p:nvSpPr>
+          <p:cNvPr id="14" name="TextBox 13"/>
           <p:cNvSpPr txBox="1"/>
           <p:nvPr/>
         </p:nvSpPr>
@@ -9419,7 +10090,7 @@
           <a:lstStyle/>
           <a:p>
             <a:r>
-              <a:t>Base: all respondents (n=1,011)</a:t>
+              <a:t>Base: respondents without solar (n=473)</a:t>
             </a:r>
           </a:p>
         </p:txBody>
@@ -9440,7 +10111,7 @@
           <a:lstStyle/>
           <a:p>
             <a:r>
-              <a:t>Support for a WA renewable energy target</a:t>
+              <a:t>Considering installing rooftop solar</a:t>
             </a:r>
           </a:p>
         </p:txBody>
@@ -9461,7 +10132,7 @@
           <a:lstStyle/>
           <a:p>
             <a:r>
-              <a:t>How strongly do you support or oppose WA adopting a renewable energy target? (%)</a:t>
+              <a:t>Are you considering installing rooftop solar? (%)</a:t>
             </a:r>
           </a:p>
         </p:txBody>
@@ -9483,7 +10154,7 @@
         <p:spPr>
           <a:xfrm>
             <a:off x="310896" y="1709928"/>
-            <a:ext cx="5303520" cy="4251960"/>
+            <a:ext cx="5303520" cy="4114800"/>
           </a:xfrm>
           <a:prstGeom prst="rect">
             <a:avLst/>
@@ -9492,20 +10163,175 @@
       </p:pic>
       <p:sp>
         <p:nvSpPr>
-          <p:cNvPr id="6" name="Oval 5"/>
+          <p:cNvPr id="6" name="TextBox 5"/>
+          <p:cNvSpPr txBox="1"/>
+          <p:nvPr/>
+        </p:nvSpPr>
+        <p:spPr>
+          <a:xfrm>
+            <a:off x="7379208" y="1709928"/>
+            <a:ext cx="4453128" cy="4114800"/>
+          </a:xfrm>
+          <a:prstGeom prst="rect">
+            <a:avLst/>
+          </a:prstGeom>
+          <a:noFill/>
+        </p:spPr>
+        <p:txBody>
+          <a:bodyPr wrap="square">
+            <a:spAutoFit/>
+          </a:bodyPr>
+          <a:lstStyle/>
+          <a:p>
+            <a:r>
+              <a:rPr sz="1200" b="0">
+                <a:solidFill>
+                  <a:srgbClr val="44546A"/>
+                </a:solidFill>
+                <a:latin typeface="DM Sans"/>
+              </a:rPr>
+              <a:t>Only 1 in 3 non-solar households</a:t>
+            </a:r>
+          </a:p>
+          <a:p>
+            <a:r>
+              <a:rPr sz="1200" b="0">
+                <a:solidFill>
+                  <a:srgbClr val="44546A"/>
+                </a:solidFill>
+                <a:latin typeface="DM Sans"/>
+              </a:rPr>
+              <a:t>are considering solar — 26% unsure.</a:t>
+            </a:r>
+          </a:p>
+          <a:p>
+            <a:r>
+              <a:rPr sz="1200" b="0">
+                <a:solidFill>
+                  <a:srgbClr val="44546A"/>
+                </a:solidFill>
+                <a:latin typeface="DM Sans"/>
+              </a:rPr>
+              <a:t/>
+            </a:r>
+          </a:p>
+          <a:p>
+            <a:r>
+              <a:rPr sz="1200" b="0">
+                <a:solidFill>
+                  <a:srgbClr val="44546A"/>
+                </a:solidFill>
+                <a:latin typeface="DM Sans"/>
+              </a:rPr>
+              <a:t>Most likely to consider:</a:t>
+            </a:r>
+          </a:p>
+          <a:p>
+            <a:r>
+              <a:rPr sz="1200" b="0">
+                <a:solidFill>
+                  <a:srgbClr val="00BDBB"/>
+                </a:solidFill>
+                <a:latin typeface="DM Sans"/>
+              </a:rPr>
+              <a:t>  ↑ Mortgage holders — 48%</a:t>
+            </a:r>
+          </a:p>
+          <a:p>
+            <a:r>
+              <a:rPr sz="1200" b="0">
+                <a:solidFill>
+                  <a:srgbClr val="00BDBB"/>
+                </a:solidFill>
+                <a:latin typeface="DM Sans"/>
+              </a:rPr>
+              <a:t>  ↑ 30–44 year olds — 42%</a:t>
+            </a:r>
+          </a:p>
+          <a:p>
+            <a:r>
+              <a:rPr sz="1200" b="0">
+                <a:solidFill>
+                  <a:srgbClr val="00BDBB"/>
+                </a:solidFill>
+                <a:latin typeface="DM Sans"/>
+              </a:rPr>
+              <a:t>  ↑ Income &gt;$120k — 42%</a:t>
+            </a:r>
+          </a:p>
+          <a:p>
+            <a:r>
+              <a:rPr sz="1200" b="0">
+                <a:solidFill>
+                  <a:srgbClr val="44546A"/>
+                </a:solidFill>
+                <a:latin typeface="DM Sans"/>
+              </a:rPr>
+              <a:t/>
+            </a:r>
+          </a:p>
+          <a:p>
+            <a:r>
+              <a:rPr sz="1200" b="0">
+                <a:solidFill>
+                  <a:srgbClr val="44546A"/>
+                </a:solidFill>
+                <a:latin typeface="DM Sans"/>
+              </a:rPr>
+              <a:t>Least likely:</a:t>
+            </a:r>
+          </a:p>
+          <a:p>
+            <a:r>
+              <a:rPr sz="1200" b="0">
+                <a:solidFill>
+                  <a:srgbClr val="A32015"/>
+                </a:solidFill>
+                <a:latin typeface="DM Sans"/>
+              </a:rPr>
+              <a:t>  ↓ 60+ — 24% (61% say no)</a:t>
+            </a:r>
+          </a:p>
+          <a:p>
+            <a:r>
+              <a:rPr sz="1200" b="0">
+                <a:solidFill>
+                  <a:srgbClr val="A32015"/>
+                </a:solidFill>
+                <a:latin typeface="DM Sans"/>
+              </a:rPr>
+              <a:t>  ↓ Income &lt;$60k — 23%</a:t>
+            </a:r>
+          </a:p>
+          <a:p>
+            <a:r>
+              <a:rPr sz="1200" b="0">
+                <a:solidFill>
+                  <a:srgbClr val="A32015"/>
+                </a:solidFill>
+                <a:latin typeface="DM Sans"/>
+              </a:rPr>
+              <a:t>  ↓ Retired — 21%</a:t>
+            </a:r>
+          </a:p>
+        </p:txBody>
+      </p:sp>
+      <p:sp>
+        <p:nvSpPr>
+          <p:cNvPr id="7" name="Oval 6"/>
           <p:cNvSpPr/>
           <p:nvPr/>
         </p:nvSpPr>
         <p:spPr>
           <a:xfrm>
-            <a:off x="4593777" y="2305882"/>
-            <a:ext cx="798007" cy="798007"/>
+            <a:off x="11548872" y="6217920"/>
+            <a:ext cx="274320" cy="274320"/>
           </a:xfrm>
           <a:prstGeom prst="ellipse">
             <a:avLst/>
           </a:prstGeom>
           <a:solidFill>
-            <a:srgbClr val="00BDBB"/>
+            <a:srgbClr val="027F7C"/>
           </a:solidFill>
           <a:ln>
             <a:noFill/>
@@ -9535,406 +10361,7 @@
       </p:sp>
       <p:sp>
         <p:nvSpPr>
-          <p:cNvPr id="7" name="TextBox 6"/>
-          <p:cNvSpPr txBox="1"/>
-          <p:nvPr/>
-        </p:nvSpPr>
-        <p:spPr>
-          <a:xfrm>
-            <a:off x="4593777" y="2353763"/>
-            <a:ext cx="798007" cy="414964"/>
-          </a:xfrm>
-          <a:prstGeom prst="rect">
-            <a:avLst/>
-          </a:prstGeom>
-          <a:noFill/>
-        </p:spPr>
-        <p:txBody>
-          <a:bodyPr wrap="none">
-            <a:spAutoFit/>
-          </a:bodyPr>
-          <a:lstStyle/>
-          <a:p>
-            <a:pPr algn="ctr"/>
-            <a:r>
-              <a:rPr sz="2700" b="1">
-                <a:solidFill>
-                  <a:srgbClr val="FFFFFF"/>
-                </a:solidFill>
-                <a:latin typeface="DM Sans"/>
-              </a:rPr>
-              <a:t>62</a:t>
-            </a:r>
-            <a:r>
-              <a:rPr sz="1700" b="1">
-                <a:solidFill>
-                  <a:srgbClr val="FFFFFF"/>
-                </a:solidFill>
-                <a:latin typeface="DM Sans"/>
-              </a:rPr>
-              <a:t>%</a:t>
-            </a:r>
-          </a:p>
-        </p:txBody>
-      </p:sp>
-      <p:sp>
-        <p:nvSpPr>
           <p:cNvPr id="8" name="TextBox 7"/>
-          <p:cNvSpPr txBox="1"/>
-          <p:nvPr/>
-        </p:nvSpPr>
-        <p:spPr>
-          <a:xfrm>
-            <a:off x="4593777" y="2752767"/>
-            <a:ext cx="798007" cy="303242"/>
-          </a:xfrm>
-          <a:prstGeom prst="rect">
-            <a:avLst/>
-          </a:prstGeom>
-          <a:noFill/>
-        </p:spPr>
-        <p:txBody>
-          <a:bodyPr wrap="square">
-            <a:spAutoFit/>
-          </a:bodyPr>
-          <a:lstStyle/>
-          <a:p>
-            <a:pPr algn="ctr"/>
-            <a:r>
-              <a:rPr sz="1300" b="0" i="0">
-                <a:solidFill>
-                  <a:srgbClr val="FFFFFF"/>
-                </a:solidFill>
-                <a:latin typeface="DM Sans"/>
-              </a:rPr>
-              <a:t>Support</a:t>
-            </a:r>
-          </a:p>
-        </p:txBody>
-      </p:sp>
-      <p:sp>
-        <p:nvSpPr>
-          <p:cNvPr id="9" name="Oval 8"/>
-          <p:cNvSpPr/>
-          <p:nvPr/>
-        </p:nvSpPr>
-        <p:spPr>
-          <a:xfrm>
-            <a:off x="2619668" y="3910504"/>
-            <a:ext cx="718207" cy="718207"/>
-          </a:xfrm>
-          <a:prstGeom prst="ellipse">
-            <a:avLst/>
-          </a:prstGeom>
-          <a:solidFill>
-            <a:srgbClr val="A32015"/>
-          </a:solidFill>
-          <a:ln>
-            <a:noFill/>
-          </a:ln>
-        </p:spPr>
-        <p:style>
-          <a:lnRef idx="1">
-            <a:schemeClr val="accent1"/>
-          </a:lnRef>
-          <a:fillRef idx="3">
-            <a:schemeClr val="accent1"/>
-          </a:fillRef>
-          <a:effectRef idx="2">
-            <a:schemeClr val="accent1"/>
-          </a:effectRef>
-          <a:fontRef idx="minor">
-            <a:schemeClr val="lt1"/>
-          </a:fontRef>
-        </p:style>
-        <p:txBody>
-          <a:bodyPr rtlCol="0" anchor="ctr"/>
-          <a:lstStyle/>
-          <a:p>
-            <a:pPr algn="ctr"/>
-          </a:p>
-        </p:txBody>
-      </p:sp>
-      <p:sp>
-        <p:nvSpPr>
-          <p:cNvPr id="10" name="TextBox 9"/>
-          <p:cNvSpPr txBox="1"/>
-          <p:nvPr/>
-        </p:nvSpPr>
-        <p:spPr>
-          <a:xfrm>
-            <a:off x="2619668" y="3953596"/>
-            <a:ext cx="718207" cy="373467"/>
-          </a:xfrm>
-          <a:prstGeom prst="rect">
-            <a:avLst/>
-          </a:prstGeom>
-          <a:noFill/>
-        </p:spPr>
-        <p:txBody>
-          <a:bodyPr wrap="none">
-            <a:spAutoFit/>
-          </a:bodyPr>
-          <a:lstStyle/>
-          <a:p>
-            <a:pPr algn="ctr"/>
-            <a:r>
-              <a:rPr sz="2400" b="1">
-                <a:solidFill>
-                  <a:srgbClr val="FFFFFF"/>
-                </a:solidFill>
-                <a:latin typeface="DM Sans"/>
-              </a:rPr>
-              <a:t>15</a:t>
-            </a:r>
-            <a:r>
-              <a:rPr sz="1500" b="1">
-                <a:solidFill>
-                  <a:srgbClr val="FFFFFF"/>
-                </a:solidFill>
-                <a:latin typeface="DM Sans"/>
-              </a:rPr>
-              <a:t>%</a:t>
-            </a:r>
-          </a:p>
-        </p:txBody>
-      </p:sp>
-      <p:sp>
-        <p:nvSpPr>
-          <p:cNvPr id="11" name="TextBox 10"/>
-          <p:cNvSpPr txBox="1"/>
-          <p:nvPr/>
-        </p:nvSpPr>
-        <p:spPr>
-          <a:xfrm>
-            <a:off x="2619668" y="4312700"/>
-            <a:ext cx="718207" cy="272918"/>
-          </a:xfrm>
-          <a:prstGeom prst="rect">
-            <a:avLst/>
-          </a:prstGeom>
-          <a:noFill/>
-        </p:spPr>
-        <p:txBody>
-          <a:bodyPr wrap="square">
-            <a:spAutoFit/>
-          </a:bodyPr>
-          <a:lstStyle/>
-          <a:p>
-            <a:pPr algn="ctr"/>
-            <a:r>
-              <a:rPr sz="1200" b="0" i="0">
-                <a:solidFill>
-                  <a:srgbClr val="FFFFFF"/>
-                </a:solidFill>
-                <a:latin typeface="DM Sans"/>
-              </a:rPr>
-              <a:t>Oppose</a:t>
-            </a:r>
-          </a:p>
-        </p:txBody>
-      </p:sp>
-      <p:sp>
-        <p:nvSpPr>
-          <p:cNvPr id="12" name="TextBox 11"/>
-          <p:cNvSpPr txBox="1"/>
-          <p:nvPr/>
-        </p:nvSpPr>
-        <p:spPr>
-          <a:xfrm>
-            <a:off x="7379208" y="1709928"/>
-            <a:ext cx="4453128" cy="4251960"/>
-          </a:xfrm>
-          <a:prstGeom prst="rect">
-            <a:avLst/>
-          </a:prstGeom>
-          <a:noFill/>
-        </p:spPr>
-        <p:txBody>
-          <a:bodyPr wrap="square">
-            <a:spAutoFit/>
-          </a:bodyPr>
-          <a:lstStyle/>
-          <a:p>
-            <a:r>
-              <a:rPr sz="1200" b="0">
-                <a:solidFill>
-                  <a:srgbClr val="44546A"/>
-                </a:solidFill>
-                <a:latin typeface="DM Sans"/>
-              </a:rPr>
-              <a:t>62% support a renewable energy target;</a:t>
-            </a:r>
-          </a:p>
-          <a:p>
-            <a:r>
-              <a:rPr sz="1200" b="0">
-                <a:solidFill>
-                  <a:srgbClr val="44546A"/>
-                </a:solidFill>
-                <a:latin typeface="DM Sans"/>
-              </a:rPr>
-              <a:t>only 15% oppose.</a:t>
-            </a:r>
-          </a:p>
-          <a:p>
-            <a:r>
-              <a:rPr sz="1200" b="0">
-                <a:solidFill>
-                  <a:srgbClr val="44546A"/>
-                </a:solidFill>
-                <a:latin typeface="DM Sans"/>
-              </a:rPr>
-              <a:t/>
-            </a:r>
-          </a:p>
-          <a:p>
-            <a:r>
-              <a:rPr sz="1200" b="0">
-                <a:solidFill>
-                  <a:srgbClr val="44546A"/>
-                </a:solidFill>
-                <a:latin typeface="DM Sans"/>
-              </a:rPr>
-              <a:t>Strongest support among:</a:t>
-            </a:r>
-          </a:p>
-          <a:p>
-            <a:r>
-              <a:rPr sz="1200" b="0">
-                <a:solidFill>
-                  <a:srgbClr val="00BDBB"/>
-                </a:solidFill>
-                <a:latin typeface="DM Sans"/>
-              </a:rPr>
-              <a:t>  ↑ WA Labor voters — 78%</a:t>
-            </a:r>
-          </a:p>
-          <a:p>
-            <a:r>
-              <a:rPr sz="1200" b="0">
-                <a:solidFill>
-                  <a:srgbClr val="00BDBB"/>
-                </a:solidFill>
-                <a:latin typeface="DM Sans"/>
-              </a:rPr>
-              <a:t>  ↑ Inner city Perth — 70%</a:t>
-            </a:r>
-          </a:p>
-          <a:p>
-            <a:r>
-              <a:rPr sz="1200" b="0">
-                <a:solidFill>
-                  <a:srgbClr val="00BDBB"/>
-                </a:solidFill>
-                <a:latin typeface="DM Sans"/>
-              </a:rPr>
-              <a:t>  ↑ 30–44 year olds — 66%</a:t>
-            </a:r>
-          </a:p>
-          <a:p>
-            <a:r>
-              <a:rPr sz="1200" b="0">
-                <a:solidFill>
-                  <a:srgbClr val="00BDBB"/>
-                </a:solidFill>
-                <a:latin typeface="DM Sans"/>
-              </a:rPr>
-              <a:t>  ↑ Solar owners — 70%</a:t>
-            </a:r>
-          </a:p>
-          <a:p>
-            <a:r>
-              <a:rPr sz="1200" b="0">
-                <a:solidFill>
-                  <a:srgbClr val="44546A"/>
-                </a:solidFill>
-                <a:latin typeface="DM Sans"/>
-              </a:rPr>
-              <a:t/>
-            </a:r>
-          </a:p>
-          <a:p>
-            <a:r>
-              <a:rPr sz="1200" b="0">
-                <a:solidFill>
-                  <a:srgbClr val="44546A"/>
-                </a:solidFill>
-                <a:latin typeface="DM Sans"/>
-              </a:rPr>
-              <a:t>Most opposition from:</a:t>
-            </a:r>
-          </a:p>
-          <a:p>
-            <a:r>
-              <a:rPr sz="1200" b="0">
-                <a:solidFill>
-                  <a:srgbClr val="A32015"/>
-                </a:solidFill>
-                <a:latin typeface="DM Sans"/>
-              </a:rPr>
-              <a:t>  ↓ One Nation — 35% support, 46% oppose</a:t>
-            </a:r>
-          </a:p>
-          <a:p>
-            <a:r>
-              <a:rPr sz="1200" b="0">
-                <a:solidFill>
-                  <a:srgbClr val="A32015"/>
-                </a:solidFill>
-                <a:latin typeface="DM Sans"/>
-              </a:rPr>
-              <a:t>  ↓ 60+ — 56% support, 25% oppose</a:t>
-            </a:r>
-          </a:p>
-        </p:txBody>
-      </p:sp>
-      <p:sp>
-        <p:nvSpPr>
-          <p:cNvPr id="13" name="Oval 12"/>
-          <p:cNvSpPr/>
-          <p:nvPr/>
-        </p:nvSpPr>
-        <p:spPr>
-          <a:xfrm>
-            <a:off x="11548872" y="6217920"/>
-            <a:ext cx="274320" cy="274320"/>
-          </a:xfrm>
-          <a:prstGeom prst="ellipse">
-            <a:avLst/>
-          </a:prstGeom>
-          <a:solidFill>
-            <a:srgbClr val="027F7C"/>
-          </a:solidFill>
-          <a:ln>
-            <a:noFill/>
-          </a:ln>
-        </p:spPr>
-        <p:style>
-          <a:lnRef idx="1">
-            <a:schemeClr val="accent1"/>
-          </a:lnRef>
-          <a:fillRef idx="3">
-            <a:schemeClr val="accent1"/>
-          </a:fillRef>
-          <a:effectRef idx="2">
-            <a:schemeClr val="accent1"/>
-          </a:effectRef>
-          <a:fontRef idx="minor">
-            <a:schemeClr val="lt1"/>
-          </a:fontRef>
-        </p:style>
-        <p:txBody>
-          <a:bodyPr rtlCol="0" anchor="ctr"/>
-          <a:lstStyle/>
-          <a:p>
-            <a:pPr algn="ctr"/>
-          </a:p>
-        </p:txBody>
-      </p:sp>
-      <p:sp>
-        <p:nvSpPr>
-          <p:cNvPr id="14" name="TextBox 13"/>
           <p:cNvSpPr txBox="1"/>
           <p:nvPr/>
         </p:nvSpPr>

--- a/sample_data/wa_energy_output.pptx
+++ b/sample_data/wa_energy_output.pptx
@@ -6962,62 +6962,112 @@
       <p:grpSpPr/>
       <p:sp>
         <p:nvSpPr>
-          <p:cNvPr id="2" name="Text Placeholder 1"/>
-          <p:cNvSpPr>
-            <a:spLocks noGrp="1"/>
-          </p:cNvSpPr>
-          <p:nvPr>
-            <p:ph type="body" idx="22" sz="quarter"/>
-          </p:nvPr>
-        </p:nvSpPr>
-        <p:spPr/>
-        <p:txBody>
-          <a:bodyPr/>
+          <p:cNvPr id="2" name="TextBox 1"/>
+          <p:cNvSpPr txBox="1"/>
+          <p:nvPr/>
+        </p:nvSpPr>
+        <p:spPr>
+          <a:xfrm>
+            <a:off x="310896" y="201168"/>
+            <a:ext cx="11567160" cy="749808"/>
+          </a:xfrm>
+          <a:prstGeom prst="rect">
+            <a:avLst/>
+          </a:prstGeom>
+          <a:noFill/>
+        </p:spPr>
+        <p:txBody>
+          <a:bodyPr wrap="square">
+            <a:spAutoFit/>
+          </a:bodyPr>
           <a:lstStyle/>
           <a:p>
-            <a:r>
-              <a:t>Base: those who support a target (n=626)</a:t>
-            </a:r>
-          </a:p>
-        </p:txBody>
-      </p:sp>
-      <p:sp>
-        <p:nvSpPr>
-          <p:cNvPr id="3" name="Title 2"/>
-          <p:cNvSpPr>
-            <a:spLocks noGrp="1"/>
-          </p:cNvSpPr>
-          <p:nvPr>
-            <p:ph type="title"/>
-          </p:nvPr>
-        </p:nvSpPr>
-        <p:spPr/>
-        <p:txBody>
-          <a:bodyPr/>
+            <a:pPr algn="l"/>
+            <a:r>
+              <a:rPr sz="1800" b="1" i="0">
+                <a:solidFill>
+                  <a:srgbClr val="027F7C"/>
+                </a:solidFill>
+                <a:latin typeface="DM Sans"/>
+              </a:rPr>
+              <a:t>Main reason for supporting a renewable energy target</a:t>
+            </a:r>
+          </a:p>
+        </p:txBody>
+      </p:sp>
+      <p:sp>
+        <p:nvSpPr>
+          <p:cNvPr id="3" name="Rectangle 2"/>
+          <p:cNvSpPr/>
+          <p:nvPr/>
+        </p:nvSpPr>
+        <p:spPr>
+          <a:xfrm>
+            <a:off x="310896" y="1005840"/>
+            <a:ext cx="11878056" cy="27432"/>
+          </a:xfrm>
+          <a:prstGeom prst="rect">
+            <a:avLst/>
+          </a:prstGeom>
+          <a:solidFill>
+            <a:srgbClr val="027F7C"/>
+          </a:solidFill>
+          <a:ln>
+            <a:noFill/>
+          </a:ln>
+        </p:spPr>
+        <p:style>
+          <a:lnRef idx="1">
+            <a:schemeClr val="accent1"/>
+          </a:lnRef>
+          <a:fillRef idx="3">
+            <a:schemeClr val="accent1"/>
+          </a:fillRef>
+          <a:effectRef idx="2">
+            <a:schemeClr val="accent1"/>
+          </a:effectRef>
+          <a:fontRef idx="minor">
+            <a:schemeClr val="lt1"/>
+          </a:fontRef>
+        </p:style>
+        <p:txBody>
+          <a:bodyPr rtlCol="0" anchor="ctr"/>
           <a:lstStyle/>
           <a:p>
-            <a:r>
-              <a:t>Main reason for supporting a renewable energy target</a:t>
-            </a:r>
-          </a:p>
-        </p:txBody>
-      </p:sp>
-      <p:sp>
-        <p:nvSpPr>
-          <p:cNvPr id="4" name="Text Placeholder 3"/>
-          <p:cNvSpPr>
-            <a:spLocks noGrp="1"/>
-          </p:cNvSpPr>
-          <p:nvPr>
-            <p:ph type="body" idx="21" sz="quarter"/>
-          </p:nvPr>
-        </p:nvSpPr>
-        <p:spPr/>
-        <p:txBody>
-          <a:bodyPr/>
+            <a:pPr algn="ctr"/>
+          </a:p>
+        </p:txBody>
+      </p:sp>
+      <p:sp>
+        <p:nvSpPr>
+          <p:cNvPr id="4" name="TextBox 3"/>
+          <p:cNvSpPr txBox="1"/>
+          <p:nvPr/>
+        </p:nvSpPr>
+        <p:spPr>
+          <a:xfrm>
+            <a:off x="310896" y="1042415"/>
+            <a:ext cx="8229600" cy="347472"/>
+          </a:xfrm>
+          <a:prstGeom prst="rect">
+            <a:avLst/>
+          </a:prstGeom>
+          <a:noFill/>
+        </p:spPr>
+        <p:txBody>
+          <a:bodyPr wrap="square">
+            <a:spAutoFit/>
+          </a:bodyPr>
           <a:lstStyle/>
           <a:p>
-            <a:r>
+            <a:pPr algn="l"/>
+            <a:r>
+              <a:rPr sz="1100" b="0" i="1">
+                <a:solidFill>
+                  <a:srgbClr val="44546A"/>
+                </a:solidFill>
+                <a:latin typeface="DM Sans"/>
+              </a:rPr>
               <a:t>What is the main reason for supporting a target? (%, among supporters)</a:t>
             </a:r>
           </a:p>
@@ -7033,7 +7083,7 @@
         </p:nvGraphicFramePr>
         <p:xfrm>
           <a:off x="310896" y="1709928"/>
-          <a:ext cx="5303519" cy="4599432"/>
+          <a:ext cx="11512295" cy="4645152"/>
         </p:xfrm>
         <a:graphic>
           <a:graphicData uri="http://schemas.openxmlformats.org/drawingml/2006/table">
@@ -7042,10 +7092,10 @@
                 <a:tableStyleId>{5C22544A-7EE6-4342-B048-85BDC9FD1C3A}</a:tableStyleId>
               </a:tblPr>
               <a:tblGrid>
-                <a:gridCol w="4136745"/>
-                <a:gridCol w="1166774"/>
+                <a:gridCol w="9785451"/>
+                <a:gridCol w="1726844"/>
               </a:tblGrid>
-              <a:tr h="306628">
+              <a:tr h="309676">
                 <a:tc>
                   <a:txBody>
                     <a:bodyPr wrap="none"/>
@@ -7093,10 +7143,10 @@
                   </a:tcPr>
                 </a:tc>
               </a:tr>
-              <a:tr h="306628">
+              <a:tr h="309676">
                 <a:tc>
                   <a:txBody>
-                    <a:bodyPr wrap="none"/>
+                    <a:bodyPr wrap="square"/>
                     <a:lstStyle/>
                     <a:p>
                       <a:pPr algn="l"/>
@@ -7107,7 +7157,16 @@
                           </a:solidFill>
                           <a:latin typeface="DM Sans"/>
                         </a:rPr>
-                        <a:t>Clear goals &amp; direction</a:t>
+                        <a:t>Targets create direction and momentum</a:t>
+                      </a:r>
+                      <a:r>
+                        <a:rPr sz="1000" b="0">
+                          <a:solidFill>
+                            <a:srgbClr val="027F7C"/>
+                          </a:solidFill>
+                          <a:latin typeface="DM Sans"/>
+                        </a:rPr>
+                        <a:t>: Provides a clear goal and encourages progress.</a:t>
                       </a:r>
                     </a:p>
                   </a:txBody>
@@ -7141,13 +7200,22 @@
                   </a:tcPr>
                 </a:tc>
               </a:tr>
-              <a:tr h="306628">
+              <a:tr h="309676">
                 <a:tc>
                   <a:txBody>
-                    <a:bodyPr wrap="none"/>
+                    <a:bodyPr wrap="square"/>
                     <a:lstStyle/>
                     <a:p>
                       <a:pPr algn="l"/>
+                      <a:r>
+                        <a:rPr sz="1000" b="1">
+                          <a:solidFill>
+                            <a:srgbClr val="44546A"/>
+                          </a:solidFill>
+                          <a:latin typeface="DM Sans"/>
+                        </a:rPr>
+                        <a:t>“Right thing to do” / general support</a:t>
+                      </a:r>
                       <a:r>
                         <a:rPr sz="1000" b="0">
                           <a:solidFill>
@@ -7155,7 +7223,7 @@
                           </a:solidFill>
                           <a:latin typeface="DM Sans"/>
                         </a:rPr>
-                        <a:t>“Right thing to do” / general support: Values-based support without a specific reason.</a:t>
+                        <a:t>: Values-based support without a specific reason.</a:t>
                       </a:r>
                     </a:p>
                   </a:txBody>
@@ -7189,13 +7257,22 @@
                   </a:tcPr>
                 </a:tc>
               </a:tr>
-              <a:tr h="306628">
+              <a:tr h="309676">
                 <a:tc>
                   <a:txBody>
-                    <a:bodyPr wrap="none"/>
+                    <a:bodyPr wrap="square"/>
                     <a:lstStyle/>
                     <a:p>
                       <a:pPr algn="l"/>
+                      <a:r>
+                        <a:rPr sz="1000" b="1">
+                          <a:solidFill>
+                            <a:srgbClr val="44546A"/>
+                          </a:solidFill>
+                          <a:latin typeface="DM Sans"/>
+                        </a:rPr>
+                        <a:t>Better environment and health outcomes</a:t>
+                      </a:r>
                       <a:r>
                         <a:rPr sz="1000" b="0">
                           <a:solidFill>
@@ -7203,7 +7280,7 @@
                           </a:solidFill>
                           <a:latin typeface="DM Sans"/>
                         </a:rPr>
-                        <a:t>Better environment &amp; health</a:t>
+                        <a:t>: Cleaner air, less pollution, and protecting ecosystems.</a:t>
                       </a:r>
                     </a:p>
                   </a:txBody>
@@ -7237,13 +7314,22 @@
                   </a:tcPr>
                 </a:tc>
               </a:tr>
-              <a:tr h="306628">
+              <a:tr h="309676">
                 <a:tc>
                   <a:txBody>
-                    <a:bodyPr wrap="none"/>
+                    <a:bodyPr wrap="square"/>
                     <a:lstStyle/>
                     <a:p>
                       <a:pPr algn="l"/>
+                      <a:r>
+                        <a:rPr sz="1000" b="1">
+                          <a:solidFill>
+                            <a:srgbClr val="44546A"/>
+                          </a:solidFill>
+                          <a:latin typeface="DM Sans"/>
+                        </a:rPr>
+                        <a:t>Climate change and emissions reduction</a:t>
+                      </a:r>
                       <a:r>
                         <a:rPr sz="1000" b="0">
                           <a:solidFill>
@@ -7251,7 +7337,7 @@
                           </a:solidFill>
                           <a:latin typeface="DM Sans"/>
                         </a:rPr>
-                        <a:t>Climate &amp; emissions reduction</a:t>
+                        <a:t>: Cutting greenhouse gas emissions and addressing climate change.</a:t>
                       </a:r>
                     </a:p>
                   </a:txBody>
@@ -7285,13 +7371,22 @@
                   </a:tcPr>
                 </a:tc>
               </a:tr>
-              <a:tr h="306628">
+              <a:tr h="309676">
                 <a:tc>
                   <a:txBody>
-                    <a:bodyPr wrap="none"/>
+                    <a:bodyPr wrap="square"/>
                     <a:lstStyle/>
                     <a:p>
                       <a:pPr algn="l"/>
+                      <a:r>
+                        <a:rPr sz="1000" b="1">
+                          <a:solidFill>
+                            <a:srgbClr val="44546A"/>
+                          </a:solidFill>
+                          <a:latin typeface="DM Sans"/>
+                        </a:rPr>
+                        <a:t>Reduce reliance on fossil fuels</a:t>
+                      </a:r>
                       <a:r>
                         <a:rPr sz="1000" b="0">
                           <a:solidFill>
@@ -7299,7 +7394,7 @@
                           </a:solidFill>
                           <a:latin typeface="DM Sans"/>
                         </a:rPr>
-                        <a:t>Reduce fossil fuel reliance</a:t>
+                        <a:t>: Accelerates the transition away from coal and gas.</a:t>
                       </a:r>
                     </a:p>
                   </a:txBody>
@@ -7333,13 +7428,22 @@
                   </a:tcPr>
                 </a:tc>
               </a:tr>
-              <a:tr h="306628">
+              <a:tr h="309676">
                 <a:tc>
                   <a:txBody>
-                    <a:bodyPr wrap="none"/>
+                    <a:bodyPr wrap="square"/>
                     <a:lstStyle/>
                     <a:p>
                       <a:pPr algn="l"/>
+                      <a:r>
+                        <a:rPr sz="1000" b="1">
+                          <a:solidFill>
+                            <a:srgbClr val="44546A"/>
+                          </a:solidFill>
+                          <a:latin typeface="DM Sans"/>
+                        </a:rPr>
+                        <a:t>Accountability and measurement</a:t>
+                      </a:r>
                       <a:r>
                         <a:rPr sz="1000" b="0">
                           <a:solidFill>
@@ -7347,7 +7451,7 @@
                           </a:solidFill>
                           <a:latin typeface="DM Sans"/>
                         </a:rPr>
-                        <a:t>Accountability &amp; measurement</a:t>
+                        <a:t>: Enables progress tracking and holds government and industry accountable.</a:t>
                       </a:r>
                     </a:p>
                   </a:txBody>
@@ -7381,13 +7485,22 @@
                   </a:tcPr>
                 </a:tc>
               </a:tr>
-              <a:tr h="306628">
+              <a:tr h="309676">
                 <a:tc>
                   <a:txBody>
-                    <a:bodyPr wrap="none"/>
+                    <a:bodyPr wrap="square"/>
                     <a:lstStyle/>
                     <a:p>
                       <a:pPr algn="l"/>
+                      <a:r>
+                        <a:rPr sz="1000" b="1">
+                          <a:solidFill>
+                            <a:srgbClr val="44546A"/>
+                          </a:solidFill>
+                          <a:latin typeface="DM Sans"/>
+                        </a:rPr>
+                        <a:t>Cost of living and cheaper power over time</a:t>
+                      </a:r>
                       <a:r>
                         <a:rPr sz="1000" b="0">
                           <a:solidFill>
@@ -7395,7 +7508,7 @@
                           </a:solidFill>
                           <a:latin typeface="DM Sans"/>
                         </a:rPr>
-                        <a:t>Cheaper power over time</a:t>
+                        <a:t>: Expectation renewables will lower electricity costs.</a:t>
                       </a:r>
                     </a:p>
                   </a:txBody>
@@ -7429,13 +7542,22 @@
                   </a:tcPr>
                 </a:tc>
               </a:tr>
-              <a:tr h="306628">
+              <a:tr h="309676">
                 <a:tc>
                   <a:txBody>
-                    <a:bodyPr wrap="none"/>
+                    <a:bodyPr wrap="square"/>
                     <a:lstStyle/>
                     <a:p>
                       <a:pPr algn="l"/>
+                      <a:r>
+                        <a:rPr sz="1000" b="1">
+                          <a:solidFill>
+                            <a:srgbClr val="44546A"/>
+                          </a:solidFill>
+                          <a:latin typeface="DM Sans"/>
+                        </a:rPr>
+                        <a:t>Future generations</a:t>
+                      </a:r>
                       <a:r>
                         <a:rPr sz="1000" b="0">
                           <a:solidFill>
@@ -7443,7 +7565,7 @@
                           </a:solidFill>
                           <a:latin typeface="DM Sans"/>
                         </a:rPr>
-                        <a:t>Future generations</a:t>
+                        <a:t>: Ensuring a sustainable planet for children and future generations.</a:t>
                       </a:r>
                     </a:p>
                   </a:txBody>
@@ -7477,13 +7599,22 @@
                   </a:tcPr>
                 </a:tc>
               </a:tr>
-              <a:tr h="306628">
+              <a:tr h="309676">
                 <a:tc>
                   <a:txBody>
-                    <a:bodyPr wrap="none"/>
+                    <a:bodyPr wrap="square"/>
                     <a:lstStyle/>
                     <a:p>
                       <a:pPr algn="l"/>
+                      <a:r>
+                        <a:rPr sz="1000" b="1">
+                          <a:solidFill>
+                            <a:srgbClr val="44546A"/>
+                          </a:solidFill>
+                          <a:latin typeface="DM Sans"/>
+                        </a:rPr>
+                        <a:t>Conditional support focused on feasibility</a:t>
+                      </a:r>
                       <a:r>
                         <a:rPr sz="1000" b="0">
                           <a:solidFill>
@@ -7491,7 +7622,7 @@
                           </a:solidFill>
                           <a:latin typeface="DM Sans"/>
                         </a:rPr>
-                        <a:t>Conditional / feasibility</a:t>
+                        <a:t>: Support depends on targets being realistic and affordable.</a:t>
                       </a:r>
                     </a:p>
                   </a:txBody>
@@ -7525,13 +7656,22 @@
                   </a:tcPr>
                 </a:tc>
               </a:tr>
-              <a:tr h="306628">
+              <a:tr h="309676">
                 <a:tc>
                   <a:txBody>
-                    <a:bodyPr wrap="none"/>
+                    <a:bodyPr wrap="square"/>
                     <a:lstStyle/>
                     <a:p>
                       <a:pPr algn="l"/>
+                      <a:r>
+                        <a:rPr sz="1000" b="1">
+                          <a:solidFill>
+                            <a:srgbClr val="44546A"/>
+                          </a:solidFill>
+                          <a:latin typeface="DM Sans"/>
+                        </a:rPr>
+                        <a:t>Economic opportunity and jobs</a:t>
+                      </a:r>
                       <a:r>
                         <a:rPr sz="1000" b="0">
                           <a:solidFill>
@@ -7539,7 +7679,7 @@
                           </a:solidFill>
                           <a:latin typeface="DM Sans"/>
                         </a:rPr>
-                        <a:t>Economic opportunity &amp; jobs</a:t>
+                        <a:t>: Supports new industries, economic growth, and job creation.</a:t>
                       </a:r>
                     </a:p>
                   </a:txBody>
@@ -7573,13 +7713,22 @@
                   </a:tcPr>
                 </a:tc>
               </a:tr>
-              <a:tr h="306628">
+              <a:tr h="309676">
                 <a:tc>
                   <a:txBody>
-                    <a:bodyPr wrap="none"/>
+                    <a:bodyPr wrap="square"/>
                     <a:lstStyle/>
                     <a:p>
                       <a:pPr algn="l"/>
+                      <a:r>
+                        <a:rPr sz="1000" b="1">
+                          <a:solidFill>
+                            <a:srgbClr val="44546A"/>
+                          </a:solidFill>
+                          <a:latin typeface="DM Sans"/>
+                        </a:rPr>
+                        <a:t>Energy security and reliability</a:t>
+                      </a:r>
                       <a:r>
                         <a:rPr sz="1000" b="0">
                           <a:solidFill>
@@ -7587,7 +7736,7 @@
                           </a:solidFill>
                           <a:latin typeface="DM Sans"/>
                         </a:rPr>
-                        <a:t>Energy security &amp; reliability</a:t>
+                        <a:t>: Helps ensure stable and reliable energy supply.</a:t>
                       </a:r>
                     </a:p>
                   </a:txBody>
@@ -7621,13 +7770,22 @@
                   </a:tcPr>
                 </a:tc>
               </a:tr>
-              <a:tr h="306628">
+              <a:tr h="309676">
                 <a:tc>
                   <a:txBody>
-                    <a:bodyPr wrap="none"/>
+                    <a:bodyPr wrap="square"/>
                     <a:lstStyle/>
                     <a:p>
                       <a:pPr algn="l"/>
+                      <a:r>
+                        <a:rPr sz="1000" b="1">
+                          <a:solidFill>
+                            <a:srgbClr val="44546A"/>
+                          </a:solidFill>
+                          <a:latin typeface="DM Sans"/>
+                        </a:rPr>
+                        <a:t>Dissatisfaction with politics or delivery</a:t>
+                      </a:r>
                       <a:r>
                         <a:rPr sz="1000" b="0">
                           <a:solidFill>
@@ -7635,7 +7793,7 @@
                           </a:solidFill>
                           <a:latin typeface="DM Sans"/>
                         </a:rPr>
-                        <a:t>Dissatisfaction with politics</a:t>
+                        <a:t>: Criticism of government action or speed of delivery.</a:t>
                       </a:r>
                     </a:p>
                   </a:txBody>
@@ -7669,13 +7827,22 @@
                   </a:tcPr>
                 </a:tc>
               </a:tr>
-              <a:tr h="306628">
+              <a:tr h="309676">
                 <a:tc>
                   <a:txBody>
-                    <a:bodyPr wrap="none"/>
+                    <a:bodyPr wrap="square"/>
                     <a:lstStyle/>
                     <a:p>
                       <a:pPr algn="l"/>
+                      <a:r>
+                        <a:rPr sz="1000" b="1">
+                          <a:solidFill>
+                            <a:srgbClr val="44546A"/>
+                          </a:solidFill>
+                          <a:latin typeface="DM Sans"/>
+                        </a:rPr>
+                        <a:t>Certainty for planning and investment</a:t>
+                      </a:r>
                       <a:r>
                         <a:rPr sz="1000" b="0">
                           <a:solidFill>
@@ -7683,7 +7850,7 @@
                           </a:solidFill>
                           <a:latin typeface="DM Sans"/>
                         </a:rPr>
-                        <a:t>Certainty for investment</a:t>
+                        <a:t>: Provides clarity for long-term planning and investment.</a:t>
                       </a:r>
                     </a:p>
                   </a:txBody>
@@ -7717,15 +7884,15 @@
                   </a:tcPr>
                 </a:tc>
               </a:tr>
-              <a:tr h="306640">
+              <a:tr h="309688">
                 <a:tc>
                   <a:txBody>
-                    <a:bodyPr wrap="none"/>
+                    <a:bodyPr wrap="square"/>
                     <a:lstStyle/>
                     <a:p>
                       <a:pPr algn="l"/>
                       <a:r>
-                        <a:rPr sz="1000" b="0">
+                        <a:rPr sz="1000" b="1">
                           <a:solidFill>
                             <a:srgbClr val="44546A"/>
                           </a:solidFill>
@@ -7777,8 +7944,8 @@
         </p:nvSpPr>
         <p:spPr>
           <a:xfrm>
-            <a:off x="7379208" y="1709928"/>
-            <a:ext cx="4453128" cy="4114800"/>
+            <a:off x="1097280" y="6236208"/>
+            <a:ext cx="10058400" cy="256032"/>
           </a:xfrm>
           <a:prstGeom prst="rect">
             <a:avLst/>
@@ -7791,102 +7958,15 @@
           </a:bodyPr>
           <a:lstStyle/>
           <a:p>
-            <a:r>
-              <a:rPr sz="1200" b="0">
+            <a:pPr algn="l"/>
+            <a:r>
+              <a:rPr sz="800" b="0" i="1">
                 <a:solidFill>
                   <a:srgbClr val="44546A"/>
                 </a:solidFill>
                 <a:latin typeface="DM Sans"/>
               </a:rPr>
-              <a:t>Practical momentum and values-based</a:t>
-            </a:r>
-          </a:p>
-          <a:p>
-            <a:r>
-              <a:rPr sz="1200" b="0">
-                <a:solidFill>
-                  <a:srgbClr val="44546A"/>
-                </a:solidFill>
-                <a:latin typeface="DM Sans"/>
-              </a:rPr>
-              <a:t>support are the dominant themes.</a:t>
-            </a:r>
-          </a:p>
-          <a:p>
-            <a:r>
-              <a:rPr sz="1200" b="0">
-                <a:solidFill>
-                  <a:srgbClr val="44546A"/>
-                </a:solidFill>
-                <a:latin typeface="DM Sans"/>
-              </a:rPr>
-              <a:t/>
-            </a:r>
-          </a:p>
-          <a:p>
-            <a:r>
-              <a:rPr sz="1200" b="0">
-                <a:solidFill>
-                  <a:srgbClr val="44546A"/>
-                </a:solidFill>
-                <a:latin typeface="DM Sans"/>
-              </a:rPr>
-              <a:t>Top reasons:</a:t>
-            </a:r>
-          </a:p>
-          <a:p>
-            <a:r>
-              <a:rPr sz="1200" b="0">
-                <a:solidFill>
-                  <a:srgbClr val="44546A"/>
-                </a:solidFill>
-                <a:latin typeface="DM Sans"/>
-              </a:rPr>
-              <a:t>1. Clear goals &amp; direction — 25%</a:t>
-            </a:r>
-          </a:p>
-          <a:p>
-            <a:r>
-              <a:rPr sz="1200" b="0">
-                <a:solidFill>
-                  <a:srgbClr val="44546A"/>
-                </a:solidFill>
-                <a:latin typeface="DM Sans"/>
-              </a:rPr>
-              <a:t>2. 'Right thing to do' — 23%</a:t>
-            </a:r>
-          </a:p>
-          <a:p>
-            <a:r>
-              <a:rPr sz="1200" b="0">
-                <a:solidFill>
-                  <a:srgbClr val="44546A"/>
-                </a:solidFill>
-                <a:latin typeface="DM Sans"/>
-              </a:rPr>
-              <a:t>3. Better environment &amp; health — 16%</a:t>
-            </a:r>
-          </a:p>
-          <a:p>
-            <a:r>
-              <a:rPr sz="1200" b="0">
-                <a:solidFill>
-                  <a:srgbClr val="44546A"/>
-                </a:solidFill>
-                <a:latin typeface="DM Sans"/>
-              </a:rPr>
-              <a:t>4. Climate &amp; emissions — 14%</a:t>
-            </a:r>
-          </a:p>
-          <a:p>
-            <a:r>
-              <a:rPr sz="1200" b="0">
-                <a:solidFill>
-                  <a:srgbClr val="44546A"/>
-                </a:solidFill>
-                <a:latin typeface="DM Sans"/>
-              </a:rPr>
-              <a:t>5. Reduce fossil fuel reliance — 11%</a:t>
+              <a:t>Base: those who support a target (n=626)</a:t>
             </a:r>
           </a:p>
         </p:txBody>
@@ -8461,8 +8541,8 @@
         </p:blipFill>
         <p:spPr>
           <a:xfrm>
-            <a:off x="310896" y="2587752"/>
-            <a:ext cx="8229600" cy="2880360"/>
+            <a:off x="310896" y="2199132"/>
+            <a:ext cx="8229600" cy="3657600"/>
           </a:xfrm>
           <a:prstGeom prst="rect">
             <a:avLst/>
@@ -8477,8 +8557,8 @@
         </p:nvSpPr>
         <p:spPr>
           <a:xfrm>
-            <a:off x="8686800" y="2587752"/>
-            <a:ext cx="3136391" cy="2880360"/>
+            <a:off x="8686800" y="2199132"/>
+            <a:ext cx="3136391" cy="3657600"/>
           </a:xfrm>
           <a:prstGeom prst="rect">
             <a:avLst/>
@@ -9587,8 +9667,8 @@
         </p:nvSpPr>
         <p:spPr>
           <a:xfrm>
-            <a:off x="4667128" y="2305882"/>
-            <a:ext cx="798007" cy="798007"/>
+            <a:off x="4677690" y="2235470"/>
+            <a:ext cx="938832" cy="938832"/>
           </a:xfrm>
           <a:prstGeom prst="ellipse">
             <a:avLst/>
@@ -9630,8 +9710,8 @@
         </p:nvSpPr>
         <p:spPr>
           <a:xfrm>
-            <a:off x="4667128" y="2353763"/>
-            <a:ext cx="798007" cy="414964"/>
+            <a:off x="4677690" y="2291800"/>
+            <a:ext cx="938832" cy="488193"/>
           </a:xfrm>
           <a:prstGeom prst="rect">
             <a:avLst/>
@@ -9646,7 +9726,7 @@
           <a:p>
             <a:pPr algn="ctr"/>
             <a:r>
-              <a:rPr sz="2700" b="1">
+              <a:rPr sz="3100" b="1">
                 <a:solidFill>
                   <a:srgbClr val="FFFFFF"/>
                 </a:solidFill>
@@ -9655,7 +9735,7 @@
               <a:t>62</a:t>
             </a:r>
             <a:r>
-              <a:rPr sz="1700" b="1">
+              <a:rPr sz="2000" b="1">
                 <a:solidFill>
                   <a:srgbClr val="FFFFFF"/>
                 </a:solidFill>
@@ -9674,8 +9754,8 @@
         </p:nvSpPr>
         <p:spPr>
           <a:xfrm>
-            <a:off x="4667128" y="2752767"/>
-            <a:ext cx="798007" cy="303242"/>
+            <a:off x="4677690" y="2761216"/>
+            <a:ext cx="938832" cy="356756"/>
           </a:xfrm>
           <a:prstGeom prst="rect">
             <a:avLst/>
@@ -9690,7 +9770,7 @@
           <a:p>
             <a:pPr algn="ctr"/>
             <a:r>
-              <a:rPr sz="1300" b="0" i="0">
+              <a:rPr sz="1600" b="0" i="0">
                 <a:solidFill>
                   <a:srgbClr val="FFFFFF"/>
                 </a:solidFill>
@@ -9709,8 +9789,8 @@
         </p:nvSpPr>
         <p:spPr>
           <a:xfrm>
-            <a:off x="2955436" y="3910504"/>
-            <a:ext cx="718207" cy="718207"/>
+            <a:off x="2964942" y="3847133"/>
+            <a:ext cx="844949" cy="844949"/>
           </a:xfrm>
           <a:prstGeom prst="ellipse">
             <a:avLst/>
@@ -9752,8 +9832,8 @@
         </p:nvSpPr>
         <p:spPr>
           <a:xfrm>
-            <a:off x="2955436" y="3953596"/>
-            <a:ext cx="718207" cy="373467"/>
+            <a:off x="2964942" y="3897830"/>
+            <a:ext cx="844949" cy="439373"/>
           </a:xfrm>
           <a:prstGeom prst="rect">
             <a:avLst/>
@@ -9768,7 +9848,7 @@
           <a:p>
             <a:pPr algn="ctr"/>
             <a:r>
-              <a:rPr sz="2400" b="1">
+              <a:rPr sz="2800" b="1">
                 <a:solidFill>
                   <a:srgbClr val="FFFFFF"/>
                 </a:solidFill>
@@ -9777,7 +9857,7 @@
               <a:t>15</a:t>
             </a:r>
             <a:r>
-              <a:rPr sz="1500" b="1">
+              <a:rPr sz="1800" b="1">
                 <a:solidFill>
                   <a:srgbClr val="FFFFFF"/>
                 </a:solidFill>
@@ -9796,8 +9876,8 @@
         </p:nvSpPr>
         <p:spPr>
           <a:xfrm>
-            <a:off x="2955436" y="4312700"/>
-            <a:ext cx="718207" cy="272918"/>
+            <a:off x="2964942" y="4320304"/>
+            <a:ext cx="844949" cy="321080"/>
           </a:xfrm>
           <a:prstGeom prst="rect">
             <a:avLst/>
@@ -9812,7 +9892,7 @@
           <a:p>
             <a:pPr algn="ctr"/>
             <a:r>
-              <a:rPr sz="1200" b="0" i="0">
+              <a:rPr sz="1400" b="0" i="0">
                 <a:solidFill>
                   <a:srgbClr val="FFFFFF"/>
                 </a:solidFill>

--- a/sample_data/wa_energy_output.pptx
+++ b/sample_data/wa_energy_output.pptx
@@ -9754,8 +9754,8 @@
         </p:nvSpPr>
         <p:spPr>
           <a:xfrm>
-            <a:off x="4677690" y="2761216"/>
-            <a:ext cx="938832" cy="356756"/>
+            <a:off x="4489924" y="2761216"/>
+            <a:ext cx="1314365" cy="356756"/>
           </a:xfrm>
           <a:prstGeom prst="rect">
             <a:avLst/>
@@ -9763,14 +9763,14 @@
           <a:noFill/>
         </p:spPr>
         <p:txBody>
-          <a:bodyPr wrap="square">
+          <a:bodyPr wrap="none">
             <a:spAutoFit/>
           </a:bodyPr>
           <a:lstStyle/>
           <a:p>
             <a:pPr algn="ctr"/>
             <a:r>
-              <a:rPr sz="1600" b="0" i="0">
+              <a:rPr sz="1100" b="0" i="0">
                 <a:solidFill>
                   <a:srgbClr val="FFFFFF"/>
                 </a:solidFill>
@@ -9876,8 +9876,8 @@
         </p:nvSpPr>
         <p:spPr>
           <a:xfrm>
-            <a:off x="2964942" y="4320304"/>
-            <a:ext cx="844949" cy="321080"/>
+            <a:off x="2795952" y="4320304"/>
+            <a:ext cx="1182929" cy="321080"/>
           </a:xfrm>
           <a:prstGeom prst="rect">
             <a:avLst/>
@@ -9885,14 +9885,14 @@
           <a:noFill/>
         </p:spPr>
         <p:txBody>
-          <a:bodyPr wrap="square">
+          <a:bodyPr wrap="none">
             <a:spAutoFit/>
           </a:bodyPr>
           <a:lstStyle/>
           <a:p>
             <a:pPr algn="ctr"/>
             <a:r>
-              <a:rPr sz="1400" b="0" i="0">
+              <a:rPr sz="1100" b="0" i="0">
                 <a:solidFill>
                   <a:srgbClr val="FFFFFF"/>
                 </a:solidFill>

--- a/sample_data/wa_energy_output.pptx
+++ b/sample_data/wa_energy_output.pptx
@@ -6962,34 +6962,20 @@
       <p:grpSpPr/>
       <p:sp>
         <p:nvSpPr>
-          <p:cNvPr id="2" name="TextBox 1"/>
-          <p:cNvSpPr txBox="1"/>
-          <p:nvPr/>
-        </p:nvSpPr>
-        <p:spPr>
-          <a:xfrm>
-            <a:off x="310896" y="201168"/>
-            <a:ext cx="11567160" cy="749808"/>
-          </a:xfrm>
-          <a:prstGeom prst="rect">
-            <a:avLst/>
-          </a:prstGeom>
-          <a:noFill/>
-        </p:spPr>
-        <p:txBody>
-          <a:bodyPr wrap="square">
-            <a:spAutoFit/>
-          </a:bodyPr>
+          <p:cNvPr id="2" name="Title 1"/>
+          <p:cNvSpPr>
+            <a:spLocks noGrp="1"/>
+          </p:cNvSpPr>
+          <p:nvPr>
+            <p:ph type="title"/>
+          </p:nvPr>
+        </p:nvSpPr>
+        <p:spPr/>
+        <p:txBody>
+          <a:bodyPr/>
           <a:lstStyle/>
           <a:p>
-            <a:pPr algn="l"/>
-            <a:r>
-              <a:rPr sz="1800" b="1" i="0">
-                <a:solidFill>
-                  <a:srgbClr val="027F7C"/>
-                </a:solidFill>
-                <a:latin typeface="DM Sans"/>
-              </a:rPr>
+            <a:r>
               <a:t>Main reason for supporting a renewable energy target</a:t>
             </a:r>
           </a:p>
@@ -6997,85 +6983,83 @@
       </p:sp>
       <p:sp>
         <p:nvSpPr>
-          <p:cNvPr id="3" name="Rectangle 2"/>
-          <p:cNvSpPr/>
-          <p:nvPr/>
-        </p:nvSpPr>
-        <p:spPr>
-          <a:xfrm>
-            <a:off x="310896" y="1005840"/>
-            <a:ext cx="11878056" cy="27432"/>
-          </a:xfrm>
-          <a:prstGeom prst="rect">
-            <a:avLst/>
-          </a:prstGeom>
-          <a:solidFill>
-            <a:srgbClr val="027F7C"/>
-          </a:solidFill>
-          <a:ln>
-            <a:noFill/>
-          </a:ln>
-        </p:spPr>
-        <p:style>
-          <a:lnRef idx="1">
-            <a:schemeClr val="accent1"/>
-          </a:lnRef>
-          <a:fillRef idx="3">
-            <a:schemeClr val="accent1"/>
-          </a:fillRef>
-          <a:effectRef idx="2">
-            <a:schemeClr val="accent1"/>
-          </a:effectRef>
-          <a:fontRef idx="minor">
-            <a:schemeClr val="lt1"/>
-          </a:fontRef>
-        </p:style>
-        <p:txBody>
-          <a:bodyPr rtlCol="0" anchor="ctr"/>
+          <p:cNvPr id="3" name="Text Placeholder 2"/>
+          <p:cNvSpPr>
+            <a:spLocks noGrp="1"/>
+          </p:cNvSpPr>
+          <p:nvPr>
+            <p:ph type="body" idx="21" sz="quarter"/>
+          </p:nvPr>
+        </p:nvSpPr>
+        <p:spPr/>
+        <p:txBody>
+          <a:bodyPr/>
           <a:lstStyle/>
           <a:p>
-            <a:pPr algn="ctr"/>
-          </a:p>
-        </p:txBody>
-      </p:sp>
-      <p:sp>
-        <p:nvSpPr>
-          <p:cNvPr id="4" name="TextBox 3"/>
-          <p:cNvSpPr txBox="1"/>
-          <p:nvPr/>
-        </p:nvSpPr>
-        <p:spPr>
-          <a:xfrm>
-            <a:off x="310896" y="1042415"/>
-            <a:ext cx="8229600" cy="347472"/>
-          </a:xfrm>
-          <a:prstGeom prst="rect">
-            <a:avLst/>
-          </a:prstGeom>
-          <a:noFill/>
-        </p:spPr>
-        <p:txBody>
-          <a:bodyPr wrap="square">
-            <a:spAutoFit/>
-          </a:bodyPr>
+            <a:r>
+              <a:t>What is the main reason for supporting a target? (%, among supporters)</a:t>
+            </a:r>
+          </a:p>
+        </p:txBody>
+      </p:sp>
+      <p:sp>
+        <p:nvSpPr>
+          <p:cNvPr id="4" name="Text Placeholder 3"/>
+          <p:cNvSpPr>
+            <a:spLocks noGrp="1"/>
+          </p:cNvSpPr>
+          <p:nvPr>
+            <p:ph type="body" idx="22" sz="quarter"/>
+          </p:nvPr>
+        </p:nvSpPr>
+        <p:spPr/>
+        <p:txBody>
+          <a:bodyPr/>
           <a:lstStyle/>
           <a:p>
-            <a:pPr algn="l"/>
-            <a:r>
-              <a:rPr sz="1100" b="0" i="1">
-                <a:solidFill>
-                  <a:srgbClr val="44546A"/>
-                </a:solidFill>
-                <a:latin typeface="DM Sans"/>
-              </a:rPr>
-              <a:t>What is the main reason for supporting a target? (%, among supporters)</a:t>
-            </a:r>
-          </a:p>
+            <a:r>
+              <a:t>Base: those who support a target (n=626)</a:t>
+            </a:r>
+          </a:p>
+        </p:txBody>
+      </p:sp>
+      <p:sp>
+        <p:nvSpPr>
+          <p:cNvPr id="5" name="Text Placeholder 4"/>
+          <p:cNvSpPr>
+            <a:spLocks noGrp="1"/>
+          </p:cNvSpPr>
+          <p:nvPr>
+            <p:ph type="body" idx="2" sz="half"/>
+          </p:nvPr>
+        </p:nvSpPr>
+        <p:spPr/>
+        <p:txBody>
+          <a:bodyPr/>
+          <a:lstStyle/>
+          <a:p/>
+        </p:txBody>
+      </p:sp>
+      <p:sp>
+        <p:nvSpPr>
+          <p:cNvPr id="6" name="Text Placeholder 5"/>
+          <p:cNvSpPr>
+            <a:spLocks noGrp="1"/>
+          </p:cNvSpPr>
+          <p:nvPr>
+            <p:ph type="body" idx="23" sz="half"/>
+          </p:nvPr>
+        </p:nvSpPr>
+        <p:spPr/>
+        <p:txBody>
+          <a:bodyPr/>
+          <a:lstStyle/>
+          <a:p/>
         </p:txBody>
       </p:sp>
       <p:graphicFrame>
         <p:nvGraphicFramePr>
-          <p:cNvPr id="5" name="Table 4"/>
+          <p:cNvPr id="7" name="Table 6"/>
           <p:cNvGraphicFramePr>
             <a:graphicFrameLocks noGrp="1"/>
           </p:cNvGraphicFramePr>
@@ -7936,119 +7920,6 @@
           </a:graphicData>
         </a:graphic>
       </p:graphicFrame>
-      <p:sp>
-        <p:nvSpPr>
-          <p:cNvPr id="6" name="TextBox 5"/>
-          <p:cNvSpPr txBox="1"/>
-          <p:nvPr/>
-        </p:nvSpPr>
-        <p:spPr>
-          <a:xfrm>
-            <a:off x="1097280" y="6236208"/>
-            <a:ext cx="10058400" cy="256032"/>
-          </a:xfrm>
-          <a:prstGeom prst="rect">
-            <a:avLst/>
-          </a:prstGeom>
-          <a:noFill/>
-        </p:spPr>
-        <p:txBody>
-          <a:bodyPr wrap="square">
-            <a:spAutoFit/>
-          </a:bodyPr>
-          <a:lstStyle/>
-          <a:p>
-            <a:pPr algn="l"/>
-            <a:r>
-              <a:rPr sz="800" b="0" i="1">
-                <a:solidFill>
-                  <a:srgbClr val="44546A"/>
-                </a:solidFill>
-                <a:latin typeface="DM Sans"/>
-              </a:rPr>
-              <a:t>Base: those who support a target (n=626)</a:t>
-            </a:r>
-          </a:p>
-        </p:txBody>
-      </p:sp>
-      <p:sp>
-        <p:nvSpPr>
-          <p:cNvPr id="7" name="Oval 6"/>
-          <p:cNvSpPr/>
-          <p:nvPr/>
-        </p:nvSpPr>
-        <p:spPr>
-          <a:xfrm>
-            <a:off x="11548872" y="6217920"/>
-            <a:ext cx="274320" cy="274320"/>
-          </a:xfrm>
-          <a:prstGeom prst="ellipse">
-            <a:avLst/>
-          </a:prstGeom>
-          <a:solidFill>
-            <a:srgbClr val="027F7C"/>
-          </a:solidFill>
-          <a:ln>
-            <a:noFill/>
-          </a:ln>
-        </p:spPr>
-        <p:style>
-          <a:lnRef idx="1">
-            <a:schemeClr val="accent1"/>
-          </a:lnRef>
-          <a:fillRef idx="3">
-            <a:schemeClr val="accent1"/>
-          </a:fillRef>
-          <a:effectRef idx="2">
-            <a:schemeClr val="accent1"/>
-          </a:effectRef>
-          <a:fontRef idx="minor">
-            <a:schemeClr val="lt1"/>
-          </a:fontRef>
-        </p:style>
-        <p:txBody>
-          <a:bodyPr rtlCol="0" anchor="ctr"/>
-          <a:lstStyle/>
-          <a:p>
-            <a:pPr algn="ctr"/>
-          </a:p>
-        </p:txBody>
-      </p:sp>
-      <p:sp>
-        <p:nvSpPr>
-          <p:cNvPr id="8" name="TextBox 7"/>
-          <p:cNvSpPr txBox="1"/>
-          <p:nvPr/>
-        </p:nvSpPr>
-        <p:spPr>
-          <a:xfrm>
-            <a:off x="11548872" y="6250838"/>
-            <a:ext cx="274320" cy="208483"/>
-          </a:xfrm>
-          <a:prstGeom prst="rect">
-            <a:avLst/>
-          </a:prstGeom>
-          <a:noFill/>
-        </p:spPr>
-        <p:txBody>
-          <a:bodyPr wrap="square">
-            <a:spAutoFit/>
-          </a:bodyPr>
-          <a:lstStyle/>
-          <a:p>
-            <a:pPr algn="ctr"/>
-            <a:r>
-              <a:rPr sz="1000" b="1" i="0">
-                <a:solidFill>
-                  <a:srgbClr val="FFFFFF"/>
-                </a:solidFill>
-                <a:latin typeface="DM Sans"/>
-              </a:rPr>
-              <a:t>7</a:t>
-            </a:r>
-          </a:p>
-        </p:txBody>
-      </p:sp>
     </p:spTree>
   </p:cSld>
   <p:clrMapOvr>
@@ -8366,84 +8237,6 @@
           </a:p>
         </p:txBody>
       </p:sp>
-      <p:sp>
-        <p:nvSpPr>
-          <p:cNvPr id="6" name="Oval 5"/>
-          <p:cNvSpPr/>
-          <p:nvPr/>
-        </p:nvSpPr>
-        <p:spPr>
-          <a:xfrm>
-            <a:off x="11548872" y="6217920"/>
-            <a:ext cx="274320" cy="274320"/>
-          </a:xfrm>
-          <a:prstGeom prst="ellipse">
-            <a:avLst/>
-          </a:prstGeom>
-          <a:solidFill>
-            <a:srgbClr val="027F7C"/>
-          </a:solidFill>
-          <a:ln>
-            <a:noFill/>
-          </a:ln>
-        </p:spPr>
-        <p:style>
-          <a:lnRef idx="1">
-            <a:schemeClr val="accent1"/>
-          </a:lnRef>
-          <a:fillRef idx="3">
-            <a:schemeClr val="accent1"/>
-          </a:fillRef>
-          <a:effectRef idx="2">
-            <a:schemeClr val="accent1"/>
-          </a:effectRef>
-          <a:fontRef idx="minor">
-            <a:schemeClr val="lt1"/>
-          </a:fontRef>
-        </p:style>
-        <p:txBody>
-          <a:bodyPr rtlCol="0" anchor="ctr"/>
-          <a:lstStyle/>
-          <a:p>
-            <a:pPr algn="ctr"/>
-          </a:p>
-        </p:txBody>
-      </p:sp>
-      <p:sp>
-        <p:nvSpPr>
-          <p:cNvPr id="7" name="TextBox 6"/>
-          <p:cNvSpPr txBox="1"/>
-          <p:nvPr/>
-        </p:nvSpPr>
-        <p:spPr>
-          <a:xfrm>
-            <a:off x="11548872" y="6250838"/>
-            <a:ext cx="274320" cy="208483"/>
-          </a:xfrm>
-          <a:prstGeom prst="rect">
-            <a:avLst/>
-          </a:prstGeom>
-          <a:noFill/>
-        </p:spPr>
-        <p:txBody>
-          <a:bodyPr wrap="square">
-            <a:spAutoFit/>
-          </a:bodyPr>
-          <a:lstStyle/>
-          <a:p>
-            <a:pPr algn="ctr"/>
-            <a:r>
-              <a:rPr sz="1000" b="1" i="0">
-                <a:solidFill>
-                  <a:srgbClr val="FFFFFF"/>
-                </a:solidFill>
-                <a:latin typeface="DM Sans"/>
-              </a:rPr>
-              <a:t>1</a:t>
-            </a:r>
-          </a:p>
-        </p:txBody>
-      </p:sp>
     </p:spTree>
   </p:cSld>
   <p:clrMapOvr>
@@ -8682,84 +8475,6 @@
           </a:p>
         </p:txBody>
       </p:sp>
-      <p:sp>
-        <p:nvSpPr>
-          <p:cNvPr id="7" name="Oval 6"/>
-          <p:cNvSpPr/>
-          <p:nvPr/>
-        </p:nvSpPr>
-        <p:spPr>
-          <a:xfrm>
-            <a:off x="11548872" y="6217920"/>
-            <a:ext cx="274320" cy="274320"/>
-          </a:xfrm>
-          <a:prstGeom prst="ellipse">
-            <a:avLst/>
-          </a:prstGeom>
-          <a:solidFill>
-            <a:srgbClr val="027F7C"/>
-          </a:solidFill>
-          <a:ln>
-            <a:noFill/>
-          </a:ln>
-        </p:spPr>
-        <p:style>
-          <a:lnRef idx="1">
-            <a:schemeClr val="accent1"/>
-          </a:lnRef>
-          <a:fillRef idx="3">
-            <a:schemeClr val="accent1"/>
-          </a:fillRef>
-          <a:effectRef idx="2">
-            <a:schemeClr val="accent1"/>
-          </a:effectRef>
-          <a:fontRef idx="minor">
-            <a:schemeClr val="lt1"/>
-          </a:fontRef>
-        </p:style>
-        <p:txBody>
-          <a:bodyPr rtlCol="0" anchor="ctr"/>
-          <a:lstStyle/>
-          <a:p>
-            <a:pPr algn="ctr"/>
-          </a:p>
-        </p:txBody>
-      </p:sp>
-      <p:sp>
-        <p:nvSpPr>
-          <p:cNvPr id="8" name="TextBox 7"/>
-          <p:cNvSpPr txBox="1"/>
-          <p:nvPr/>
-        </p:nvSpPr>
-        <p:spPr>
-          <a:xfrm>
-            <a:off x="11548872" y="6250838"/>
-            <a:ext cx="274320" cy="208483"/>
-          </a:xfrm>
-          <a:prstGeom prst="rect">
-            <a:avLst/>
-          </a:prstGeom>
-          <a:noFill/>
-        </p:spPr>
-        <p:txBody>
-          <a:bodyPr wrap="square">
-            <a:spAutoFit/>
-          </a:bodyPr>
-          <a:lstStyle/>
-          <a:p>
-            <a:pPr algn="ctr"/>
-            <a:r>
-              <a:rPr sz="1000" b="1" i="0">
-                <a:solidFill>
-                  <a:srgbClr val="FFFFFF"/>
-                </a:solidFill>
-                <a:latin typeface="DM Sans"/>
-              </a:rPr>
-              <a:t>2</a:t>
-            </a:r>
-          </a:p>
-        </p:txBody>
-      </p:sp>
     </p:spTree>
   </p:cSld>
   <p:clrMapOvr>
@@ -9031,84 +8746,6 @@
           </a:p>
         </p:txBody>
       </p:sp>
-      <p:sp>
-        <p:nvSpPr>
-          <p:cNvPr id="7" name="Oval 6"/>
-          <p:cNvSpPr/>
-          <p:nvPr/>
-        </p:nvSpPr>
-        <p:spPr>
-          <a:xfrm>
-            <a:off x="11548872" y="6217920"/>
-            <a:ext cx="274320" cy="274320"/>
-          </a:xfrm>
-          <a:prstGeom prst="ellipse">
-            <a:avLst/>
-          </a:prstGeom>
-          <a:solidFill>
-            <a:srgbClr val="027F7C"/>
-          </a:solidFill>
-          <a:ln>
-            <a:noFill/>
-          </a:ln>
-        </p:spPr>
-        <p:style>
-          <a:lnRef idx="1">
-            <a:schemeClr val="accent1"/>
-          </a:lnRef>
-          <a:fillRef idx="3">
-            <a:schemeClr val="accent1"/>
-          </a:fillRef>
-          <a:effectRef idx="2">
-            <a:schemeClr val="accent1"/>
-          </a:effectRef>
-          <a:fontRef idx="minor">
-            <a:schemeClr val="lt1"/>
-          </a:fontRef>
-        </p:style>
-        <p:txBody>
-          <a:bodyPr rtlCol="0" anchor="ctr"/>
-          <a:lstStyle/>
-          <a:p>
-            <a:pPr algn="ctr"/>
-          </a:p>
-        </p:txBody>
-      </p:sp>
-      <p:sp>
-        <p:nvSpPr>
-          <p:cNvPr id="8" name="TextBox 7"/>
-          <p:cNvSpPr txBox="1"/>
-          <p:nvPr/>
-        </p:nvSpPr>
-        <p:spPr>
-          <a:xfrm>
-            <a:off x="11548872" y="6250838"/>
-            <a:ext cx="274320" cy="208483"/>
-          </a:xfrm>
-          <a:prstGeom prst="rect">
-            <a:avLst/>
-          </a:prstGeom>
-          <a:noFill/>
-        </p:spPr>
-        <p:txBody>
-          <a:bodyPr wrap="square">
-            <a:spAutoFit/>
-          </a:bodyPr>
-          <a:lstStyle/>
-          <a:p>
-            <a:pPr algn="ctr"/>
-            <a:r>
-              <a:rPr sz="1000" b="1" i="0">
-                <a:solidFill>
-                  <a:srgbClr val="FFFFFF"/>
-                </a:solidFill>
-                <a:latin typeface="DM Sans"/>
-              </a:rPr>
-              <a:t>3</a:t>
-            </a:r>
-          </a:p>
-        </p:txBody>
-      </p:sp>
     </p:spTree>
   </p:cSld>
   <p:clrMapOvr>
@@ -9476,84 +9113,6 @@
           </a:p>
         </p:txBody>
       </p:sp>
-      <p:sp>
-        <p:nvSpPr>
-          <p:cNvPr id="7" name="Oval 6"/>
-          <p:cNvSpPr/>
-          <p:nvPr/>
-        </p:nvSpPr>
-        <p:spPr>
-          <a:xfrm>
-            <a:off x="11548872" y="6217920"/>
-            <a:ext cx="274320" cy="274320"/>
-          </a:xfrm>
-          <a:prstGeom prst="ellipse">
-            <a:avLst/>
-          </a:prstGeom>
-          <a:solidFill>
-            <a:srgbClr val="027F7C"/>
-          </a:solidFill>
-          <a:ln>
-            <a:noFill/>
-          </a:ln>
-        </p:spPr>
-        <p:style>
-          <a:lnRef idx="1">
-            <a:schemeClr val="accent1"/>
-          </a:lnRef>
-          <a:fillRef idx="3">
-            <a:schemeClr val="accent1"/>
-          </a:fillRef>
-          <a:effectRef idx="2">
-            <a:schemeClr val="accent1"/>
-          </a:effectRef>
-          <a:fontRef idx="minor">
-            <a:schemeClr val="lt1"/>
-          </a:fontRef>
-        </p:style>
-        <p:txBody>
-          <a:bodyPr rtlCol="0" anchor="ctr"/>
-          <a:lstStyle/>
-          <a:p>
-            <a:pPr algn="ctr"/>
-          </a:p>
-        </p:txBody>
-      </p:sp>
-      <p:sp>
-        <p:nvSpPr>
-          <p:cNvPr id="8" name="TextBox 7"/>
-          <p:cNvSpPr txBox="1"/>
-          <p:nvPr/>
-        </p:nvSpPr>
-        <p:spPr>
-          <a:xfrm>
-            <a:off x="11548872" y="6250838"/>
-            <a:ext cx="274320" cy="208483"/>
-          </a:xfrm>
-          <a:prstGeom prst="rect">
-            <a:avLst/>
-          </a:prstGeom>
-          <a:noFill/>
-        </p:spPr>
-        <p:txBody>
-          <a:bodyPr wrap="square">
-            <a:spAutoFit/>
-          </a:bodyPr>
-          <a:lstStyle/>
-          <a:p>
-            <a:pPr algn="ctr"/>
-            <a:r>
-              <a:rPr sz="1000" b="1" i="0">
-                <a:solidFill>
-                  <a:srgbClr val="FFFFFF"/>
-                </a:solidFill>
-                <a:latin typeface="DM Sans"/>
-              </a:rPr>
-              <a:t>4</a:t>
-            </a:r>
-          </a:p>
-        </p:txBody>
-      </p:sp>
     </p:spTree>
   </p:cSld>
   <p:clrMapOvr>
@@ -10058,84 +9617,6 @@
           </a:p>
         </p:txBody>
       </p:sp>
-      <p:sp>
-        <p:nvSpPr>
-          <p:cNvPr id="13" name="Oval 12"/>
-          <p:cNvSpPr/>
-          <p:nvPr/>
-        </p:nvSpPr>
-        <p:spPr>
-          <a:xfrm>
-            <a:off x="11548872" y="6217920"/>
-            <a:ext cx="274320" cy="274320"/>
-          </a:xfrm>
-          <a:prstGeom prst="ellipse">
-            <a:avLst/>
-          </a:prstGeom>
-          <a:solidFill>
-            <a:srgbClr val="027F7C"/>
-          </a:solidFill>
-          <a:ln>
-            <a:noFill/>
-          </a:ln>
-        </p:spPr>
-        <p:style>
-          <a:lnRef idx="1">
-            <a:schemeClr val="accent1"/>
-          </a:lnRef>
-          <a:fillRef idx="3">
-            <a:schemeClr val="accent1"/>
-          </a:fillRef>
-          <a:effectRef idx="2">
-            <a:schemeClr val="accent1"/>
-          </a:effectRef>
-          <a:fontRef idx="minor">
-            <a:schemeClr val="lt1"/>
-          </a:fontRef>
-        </p:style>
-        <p:txBody>
-          <a:bodyPr rtlCol="0" anchor="ctr"/>
-          <a:lstStyle/>
-          <a:p>
-            <a:pPr algn="ctr"/>
-          </a:p>
-        </p:txBody>
-      </p:sp>
-      <p:sp>
-        <p:nvSpPr>
-          <p:cNvPr id="14" name="TextBox 13"/>
-          <p:cNvSpPr txBox="1"/>
-          <p:nvPr/>
-        </p:nvSpPr>
-        <p:spPr>
-          <a:xfrm>
-            <a:off x="11548872" y="6250838"/>
-            <a:ext cx="274320" cy="208483"/>
-          </a:xfrm>
-          <a:prstGeom prst="rect">
-            <a:avLst/>
-          </a:prstGeom>
-          <a:noFill/>
-        </p:spPr>
-        <p:txBody>
-          <a:bodyPr wrap="square">
-            <a:spAutoFit/>
-          </a:bodyPr>
-          <a:lstStyle/>
-          <a:p>
-            <a:pPr algn="ctr"/>
-            <a:r>
-              <a:rPr sz="1000" b="1" i="0">
-                <a:solidFill>
-                  <a:srgbClr val="FFFFFF"/>
-                </a:solidFill>
-                <a:latin typeface="DM Sans"/>
-              </a:rPr>
-              <a:t>5</a:t>
-            </a:r>
-          </a:p>
-        </p:txBody>
-      </p:sp>
     </p:spTree>
   </p:cSld>
   <p:clrMapOvr>
@@ -10392,84 +9873,6 @@
                 <a:latin typeface="DM Sans"/>
               </a:rPr>
               <a:t>  ↓ Retired — 21%</a:t>
-            </a:r>
-          </a:p>
-        </p:txBody>
-      </p:sp>
-      <p:sp>
-        <p:nvSpPr>
-          <p:cNvPr id="7" name="Oval 6"/>
-          <p:cNvSpPr/>
-          <p:nvPr/>
-        </p:nvSpPr>
-        <p:spPr>
-          <a:xfrm>
-            <a:off x="11548872" y="6217920"/>
-            <a:ext cx="274320" cy="274320"/>
-          </a:xfrm>
-          <a:prstGeom prst="ellipse">
-            <a:avLst/>
-          </a:prstGeom>
-          <a:solidFill>
-            <a:srgbClr val="027F7C"/>
-          </a:solidFill>
-          <a:ln>
-            <a:noFill/>
-          </a:ln>
-        </p:spPr>
-        <p:style>
-          <a:lnRef idx="1">
-            <a:schemeClr val="accent1"/>
-          </a:lnRef>
-          <a:fillRef idx="3">
-            <a:schemeClr val="accent1"/>
-          </a:fillRef>
-          <a:effectRef idx="2">
-            <a:schemeClr val="accent1"/>
-          </a:effectRef>
-          <a:fontRef idx="minor">
-            <a:schemeClr val="lt1"/>
-          </a:fontRef>
-        </p:style>
-        <p:txBody>
-          <a:bodyPr rtlCol="0" anchor="ctr"/>
-          <a:lstStyle/>
-          <a:p>
-            <a:pPr algn="ctr"/>
-          </a:p>
-        </p:txBody>
-      </p:sp>
-      <p:sp>
-        <p:nvSpPr>
-          <p:cNvPr id="8" name="TextBox 7"/>
-          <p:cNvSpPr txBox="1"/>
-          <p:nvPr/>
-        </p:nvSpPr>
-        <p:spPr>
-          <a:xfrm>
-            <a:off x="11548872" y="6250838"/>
-            <a:ext cx="274320" cy="208483"/>
-          </a:xfrm>
-          <a:prstGeom prst="rect">
-            <a:avLst/>
-          </a:prstGeom>
-          <a:noFill/>
-        </p:spPr>
-        <p:txBody>
-          <a:bodyPr wrap="square">
-            <a:spAutoFit/>
-          </a:bodyPr>
-          <a:lstStyle/>
-          <a:p>
-            <a:pPr algn="ctr"/>
-            <a:r>
-              <a:rPr sz="1000" b="1" i="0">
-                <a:solidFill>
-                  <a:srgbClr val="FFFFFF"/>
-                </a:solidFill>
-                <a:latin typeface="DM Sans"/>
-              </a:rPr>
-              <a:t>6</a:t>
             </a:r>
           </a:p>
         </p:txBody>

--- a/sample_data/wa_energy_output.pptx
+++ b/sample_data/wa_energy_output.pptx
@@ -8292,7 +8292,7 @@
           <a:lstStyle/>
           <a:p>
             <a:r>
-              <a:t>How bad do you think using each of the following energy types is for the climate? (%)</a:t>
+              <a:t>For each of the following, how bad do you think using the following energy types are for the climate? (%)</a:t>
             </a:r>
           </a:p>
         </p:txBody>
@@ -8897,7 +8897,7 @@
           <a:lstStyle/>
           <a:p>
             <a:r>
-              <a:t>How likely do you think these outcomes would be if WA used more renewable energy? (%)</a:t>
+              <a:t>And how likely do you think these following outcomes would be if WA used more renewable energy? (%)</a:t>
             </a:r>
           </a:p>
         </p:txBody>
@@ -9189,7 +9189,7 @@
           <a:lstStyle/>
           <a:p>
             <a:r>
-              <a:t>How strongly do you support or oppose WA adopting a renewable energy target? (%)</a:t>
+              <a:t>There has been discussion about the WA government setting a target for the generation of renewable energy. How strongly do you support or oppose WA adopting a renewable energy target? (%)</a:t>
             </a:r>
           </a:p>
         </p:txBody>

--- a/sample_data/wa_energy_output.pptx
+++ b/sample_data/wa_energy_output.pptx
@@ -8335,7 +8335,7 @@
         <p:spPr>
           <a:xfrm>
             <a:off x="310896" y="2199132"/>
-            <a:ext cx="8229600" cy="3657600"/>
+            <a:ext cx="10515600" cy="3657600"/>
           </a:xfrm>
           <a:prstGeom prst="rect">
             <a:avLst/>
@@ -8940,7 +8940,7 @@
         <p:spPr>
           <a:xfrm>
             <a:off x="310896" y="2061972"/>
-            <a:ext cx="8229600" cy="3931920"/>
+            <a:ext cx="10515600" cy="3931920"/>
           </a:xfrm>
           <a:prstGeom prst="rect">
             <a:avLst/>

--- a/sample_data/wa_energy_output.pptx
+++ b/sample_data/wa_energy_output.pptx
@@ -7066,8 +7066,8 @@
           <p:nvPr/>
         </p:nvGraphicFramePr>
         <p:xfrm>
-          <a:off x="310896" y="1709928"/>
-          <a:ext cx="11512295" cy="4645152"/>
+          <a:off x="310896" y="1920240"/>
+          <a:ext cx="11512295" cy="4434840"/>
         </p:xfrm>
         <a:graphic>
           <a:graphicData uri="http://schemas.openxmlformats.org/drawingml/2006/table">
@@ -7079,7 +7079,7 @@
                 <a:gridCol w="9785451"/>
                 <a:gridCol w="1726844"/>
               </a:tblGrid>
-              <a:tr h="309676">
+              <a:tr h="295656">
                 <a:tc>
                   <a:txBody>
                     <a:bodyPr wrap="none"/>
@@ -7127,7 +7127,7 @@
                   </a:tcPr>
                 </a:tc>
               </a:tr>
-              <a:tr h="309676">
+              <a:tr h="295656">
                 <a:tc>
                   <a:txBody>
                     <a:bodyPr wrap="square"/>
@@ -7184,7 +7184,7 @@
                   </a:tcPr>
                 </a:tc>
               </a:tr>
-              <a:tr h="309676">
+              <a:tr h="295656">
                 <a:tc>
                   <a:txBody>
                     <a:bodyPr wrap="square"/>
@@ -7241,7 +7241,7 @@
                   </a:tcPr>
                 </a:tc>
               </a:tr>
-              <a:tr h="309676">
+              <a:tr h="295656">
                 <a:tc>
                   <a:txBody>
                     <a:bodyPr wrap="square"/>
@@ -7298,7 +7298,7 @@
                   </a:tcPr>
                 </a:tc>
               </a:tr>
-              <a:tr h="309676">
+              <a:tr h="295656">
                 <a:tc>
                   <a:txBody>
                     <a:bodyPr wrap="square"/>
@@ -7355,7 +7355,7 @@
                   </a:tcPr>
                 </a:tc>
               </a:tr>
-              <a:tr h="309676">
+              <a:tr h="295656">
                 <a:tc>
                   <a:txBody>
                     <a:bodyPr wrap="square"/>
@@ -7412,7 +7412,7 @@
                   </a:tcPr>
                 </a:tc>
               </a:tr>
-              <a:tr h="309676">
+              <a:tr h="295656">
                 <a:tc>
                   <a:txBody>
                     <a:bodyPr wrap="square"/>
@@ -7469,7 +7469,7 @@
                   </a:tcPr>
                 </a:tc>
               </a:tr>
-              <a:tr h="309676">
+              <a:tr h="295656">
                 <a:tc>
                   <a:txBody>
                     <a:bodyPr wrap="square"/>
@@ -7526,7 +7526,7 @@
                   </a:tcPr>
                 </a:tc>
               </a:tr>
-              <a:tr h="309676">
+              <a:tr h="295656">
                 <a:tc>
                   <a:txBody>
                     <a:bodyPr wrap="square"/>
@@ -7583,7 +7583,7 @@
                   </a:tcPr>
                 </a:tc>
               </a:tr>
-              <a:tr h="309676">
+              <a:tr h="295656">
                 <a:tc>
                   <a:txBody>
                     <a:bodyPr wrap="square"/>
@@ -7640,7 +7640,7 @@
                   </a:tcPr>
                 </a:tc>
               </a:tr>
-              <a:tr h="309676">
+              <a:tr h="295656">
                 <a:tc>
                   <a:txBody>
                     <a:bodyPr wrap="square"/>
@@ -7697,7 +7697,7 @@
                   </a:tcPr>
                 </a:tc>
               </a:tr>
-              <a:tr h="309676">
+              <a:tr h="295656">
                 <a:tc>
                   <a:txBody>
                     <a:bodyPr wrap="square"/>
@@ -7754,7 +7754,7 @@
                   </a:tcPr>
                 </a:tc>
               </a:tr>
-              <a:tr h="309676">
+              <a:tr h="295656">
                 <a:tc>
                   <a:txBody>
                     <a:bodyPr wrap="square"/>
@@ -7811,7 +7811,7 @@
                   </a:tcPr>
                 </a:tc>
               </a:tr>
-              <a:tr h="309676">
+              <a:tr h="295656">
                 <a:tc>
                   <a:txBody>
                     <a:bodyPr wrap="square"/>
@@ -7868,7 +7868,7 @@
                   </a:tcPr>
                 </a:tc>
               </a:tr>
-              <a:tr h="309688">
+              <a:tr h="295656">
                 <a:tc>
                   <a:txBody>
                     <a:bodyPr wrap="square"/>
@@ -8572,8 +8572,8 @@
         </p:blipFill>
         <p:spPr>
           <a:xfrm>
-            <a:off x="310896" y="1709928"/>
-            <a:ext cx="5303520" cy="4754880"/>
+            <a:off x="310896" y="1920240"/>
+            <a:ext cx="5303520" cy="4206240"/>
           </a:xfrm>
           <a:prstGeom prst="rect">
             <a:avLst/>
@@ -8588,8 +8588,8 @@
         </p:nvSpPr>
         <p:spPr>
           <a:xfrm>
-            <a:off x="7379208" y="1709928"/>
-            <a:ext cx="4453128" cy="4754880"/>
+            <a:off x="7379208" y="1920240"/>
+            <a:ext cx="4453128" cy="4206240"/>
           </a:xfrm>
           <a:prstGeom prst="rect">
             <a:avLst/>
@@ -9210,8 +9210,8 @@
         </p:blipFill>
         <p:spPr>
           <a:xfrm>
-            <a:off x="310896" y="1709928"/>
-            <a:ext cx="5303520" cy="4251960"/>
+            <a:off x="310896" y="1920240"/>
+            <a:ext cx="5303520" cy="4206240"/>
           </a:xfrm>
           <a:prstGeom prst="rect">
             <a:avLst/>
@@ -9226,8 +9226,8 @@
         </p:nvSpPr>
         <p:spPr>
           <a:xfrm>
-            <a:off x="4677690" y="2235470"/>
-            <a:ext cx="938832" cy="938832"/>
+            <a:off x="4676933" y="2440131"/>
+            <a:ext cx="928737" cy="928737"/>
           </a:xfrm>
           <a:prstGeom prst="ellipse">
             <a:avLst/>
@@ -9269,8 +9269,8 @@
         </p:nvSpPr>
         <p:spPr>
           <a:xfrm>
-            <a:off x="4677690" y="2291800"/>
-            <a:ext cx="938832" cy="488193"/>
+            <a:off x="4676933" y="2495855"/>
+            <a:ext cx="928737" cy="482943"/>
           </a:xfrm>
           <a:prstGeom prst="rect">
             <a:avLst/>
@@ -9313,8 +9313,8 @@
         </p:nvSpPr>
         <p:spPr>
           <a:xfrm>
-            <a:off x="4489924" y="2761216"/>
-            <a:ext cx="1314365" cy="356756"/>
+            <a:off x="4491186" y="2960224"/>
+            <a:ext cx="1300232" cy="352920"/>
           </a:xfrm>
           <a:prstGeom prst="rect">
             <a:avLst/>
@@ -9348,8 +9348,8 @@
         </p:nvSpPr>
         <p:spPr>
           <a:xfrm>
-            <a:off x="2964942" y="3847133"/>
-            <a:ext cx="844949" cy="844949"/>
+            <a:off x="2964261" y="4034464"/>
+            <a:ext cx="835864" cy="835864"/>
           </a:xfrm>
           <a:prstGeom prst="ellipse">
             <a:avLst/>
@@ -9391,8 +9391,8 @@
         </p:nvSpPr>
         <p:spPr>
           <a:xfrm>
-            <a:off x="2964942" y="3897830"/>
-            <a:ext cx="844949" cy="439373"/>
+            <a:off x="2964261" y="4084616"/>
+            <a:ext cx="835864" cy="434649"/>
           </a:xfrm>
           <a:prstGeom prst="rect">
             <a:avLst/>
@@ -9435,8 +9435,8 @@
         </p:nvSpPr>
         <p:spPr>
           <a:xfrm>
-            <a:off x="2795952" y="4320304"/>
-            <a:ext cx="1182929" cy="321080"/>
+            <a:off x="2797088" y="4502548"/>
+            <a:ext cx="1170209" cy="317628"/>
           </a:xfrm>
           <a:prstGeom prst="rect">
             <a:avLst/>
@@ -9470,8 +9470,8 @@
         </p:nvSpPr>
         <p:spPr>
           <a:xfrm>
-            <a:off x="7379208" y="1709928"/>
-            <a:ext cx="4453128" cy="4251960"/>
+            <a:off x="7379208" y="1920240"/>
+            <a:ext cx="4453128" cy="4206240"/>
           </a:xfrm>
           <a:prstGeom prst="rect">
             <a:avLst/>
@@ -9714,7 +9714,7 @@
         </p:blipFill>
         <p:spPr>
           <a:xfrm>
-            <a:off x="310896" y="1709928"/>
+            <a:off x="310896" y="1920240"/>
             <a:ext cx="5303520" cy="4114800"/>
           </a:xfrm>
           <a:prstGeom prst="rect">
@@ -9730,7 +9730,7 @@
         </p:nvSpPr>
         <p:spPr>
           <a:xfrm>
-            <a:off x="7379208" y="1709928"/>
+            <a:off x="7379208" y="1920240"/>
             <a:ext cx="4453128" cy="4114800"/>
           </a:xfrm>
           <a:prstGeom prst="rect">

--- a/sample_data/wa_energy_output.pptx
+++ b/sample_data/wa_energy_output.pptx
@@ -9355,7 +9355,7 @@
             <a:avLst/>
           </a:prstGeom>
           <a:solidFill>
-            <a:srgbClr val="A32015"/>
+            <a:srgbClr val="FA8488"/>
           </a:solidFill>
           <a:ln>
             <a:noFill/>

--- a/sample_data/wa_energy_output.pptx
+++ b/sample_data/wa_energy_output.pptx
@@ -21,6 +21,8 @@
     <p:sldId id="263" r:id="rId35"/>
     <p:sldId id="264" r:id="rId36"/>
     <p:sldId id="265" r:id="rId37"/>
+    <p:sldId id="266" r:id="rId38"/>
+    <p:sldId id="267" r:id="rId39"/>
   </p:sldIdLst>
   <p:sldSz cx="12192000" cy="6858000"/>
   <p:notesSz cx="6858000" cy="9144000"/>
@@ -7920,6 +7922,372 @@
           </a:graphicData>
         </a:graphic>
       </p:graphicFrame>
+    </p:spTree>
+  </p:cSld>
+  <p:clrMapOvr>
+    <a:masterClrMapping/>
+  </p:clrMapOvr>
+</p:sld>
+</file>
+
+<file path=ppt/slides/slide11.xml><?xml version="1.0" encoding="utf-8"?>
+<p:sld xmlns:a="http://schemas.openxmlformats.org/drawingml/2006/main" xmlns:p="http://schemas.openxmlformats.org/presentationml/2006/main" xmlns:r="http://schemas.openxmlformats.org/officeDocument/2006/relationships">
+  <p:cSld>
+    <p:spTree>
+      <p:nvGrpSpPr>
+        <p:cNvPr id="1" name=""/>
+        <p:cNvGrpSpPr/>
+        <p:nvPr/>
+      </p:nvGrpSpPr>
+      <p:grpSpPr/>
+      <p:sp>
+        <p:nvSpPr>
+          <p:cNvPr id="2" name="Title 1"/>
+          <p:cNvSpPr>
+            <a:spLocks noGrp="1"/>
+          </p:cNvSpPr>
+          <p:nvPr>
+            <p:ph type="title"/>
+          </p:nvPr>
+        </p:nvSpPr>
+        <p:spPr/>
+        <p:txBody>
+          <a:bodyPr/>
+          <a:lstStyle/>
+          <a:p>
+            <a:r>
+              <a:t>Support for a WA renewable energy target — tracking</a:t>
+            </a:r>
+          </a:p>
+        </p:txBody>
+      </p:sp>
+      <p:sp>
+        <p:nvSpPr>
+          <p:cNvPr id="3" name="Text Placeholder 2"/>
+          <p:cNvSpPr>
+            <a:spLocks noGrp="1"/>
+          </p:cNvSpPr>
+          <p:nvPr>
+            <p:ph type="body" idx="21" sz="quarter"/>
+          </p:nvPr>
+        </p:nvSpPr>
+        <p:spPr/>
+        <p:txBody>
+          <a:bodyPr/>
+          <a:lstStyle/>
+          <a:p>
+            <a:r>
+              <a:t>How strongly do you support or oppose WA adopting a renewable energy target? (%, selected waves)</a:t>
+            </a:r>
+          </a:p>
+        </p:txBody>
+      </p:sp>
+      <p:sp>
+        <p:nvSpPr>
+          <p:cNvPr id="4" name="Text Placeholder 3"/>
+          <p:cNvSpPr>
+            <a:spLocks noGrp="1"/>
+          </p:cNvSpPr>
+          <p:nvPr>
+            <p:ph type="body" idx="22" sz="quarter"/>
+          </p:nvPr>
+        </p:nvSpPr>
+        <p:spPr/>
+        <p:txBody>
+          <a:bodyPr/>
+          <a:lstStyle/>
+          <a:p>
+            <a:r>
+              <a:t>Base: all respondents (n≈1,000 per wave, illustrative)</a:t>
+            </a:r>
+          </a:p>
+        </p:txBody>
+      </p:sp>
+      <p:pic>
+        <p:nvPicPr>
+          <p:cNvPr id="5" name="Picture 4" descr="image.png"/>
+          <p:cNvPicPr>
+            <a:picLocks noChangeAspect="1"/>
+          </p:cNvPicPr>
+          <p:nvPr/>
+        </p:nvPicPr>
+        <p:blipFill>
+          <a:blip r:embed="rId2"/>
+          <a:stretch>
+            <a:fillRect/>
+          </a:stretch>
+        </p:blipFill>
+        <p:spPr>
+          <a:xfrm>
+            <a:off x="310896" y="2061972"/>
+            <a:ext cx="8229600" cy="3931920"/>
+          </a:xfrm>
+          <a:prstGeom prst="rect">
+            <a:avLst/>
+          </a:prstGeom>
+        </p:spPr>
+      </p:pic>
+      <p:sp>
+        <p:nvSpPr>
+          <p:cNvPr id="6" name="TextBox 5"/>
+          <p:cNvSpPr txBox="1"/>
+          <p:nvPr/>
+        </p:nvSpPr>
+        <p:spPr>
+          <a:xfrm>
+            <a:off x="8686800" y="2061972"/>
+            <a:ext cx="3136391" cy="3931920"/>
+          </a:xfrm>
+          <a:prstGeom prst="rect">
+            <a:avLst/>
+          </a:prstGeom>
+          <a:noFill/>
+        </p:spPr>
+        <p:txBody>
+          <a:bodyPr wrap="square">
+            <a:spAutoFit/>
+          </a:bodyPr>
+          <a:lstStyle/>
+          <a:p>
+            <a:r>
+              <a:rPr sz="1400" b="0">
+                <a:solidFill>
+                  <a:srgbClr val="44546A"/>
+                </a:solidFill>
+                <a:latin typeface="DM Sans"/>
+              </a:rPr>
+              <a:t>Support for a renewable energy target has</a:t>
+            </a:r>
+          </a:p>
+          <a:p>
+            <a:r>
+              <a:rPr sz="1400" b="0">
+                <a:solidFill>
+                  <a:srgbClr val="44546A"/>
+                </a:solidFill>
+                <a:latin typeface="DM Sans"/>
+              </a:rPr>
+              <a:t>grown steadily across all five waves.</a:t>
+            </a:r>
+          </a:p>
+          <a:p>
+            <a:r>
+              <a:rPr sz="1400" b="0">
+                <a:solidFill>
+                  <a:srgbClr val="44546A"/>
+                </a:solidFill>
+                <a:latin typeface="DM Sans"/>
+              </a:rPr>
+              <a:t/>
+            </a:r>
+          </a:p>
+          <a:p>
+            <a:r>
+              <a:rPr sz="1400" b="0">
+                <a:solidFill>
+                  <a:srgbClr val="00BDBB"/>
+                </a:solidFill>
+                <a:latin typeface="DM Sans"/>
+              </a:rPr>
+              <a:t>  ↑ Total support up 5pp since Aug 2022</a:t>
+            </a:r>
+          </a:p>
+          <a:p>
+            <a:r>
+              <a:rPr sz="1400" b="0">
+                <a:solidFill>
+                  <a:srgbClr val="A32015"/>
+                </a:solidFill>
+                <a:latin typeface="DM Sans"/>
+              </a:rPr>
+              <a:t>  ↓ Unsure down 5pp across the same period</a:t>
+            </a:r>
+          </a:p>
+        </p:txBody>
+      </p:sp>
+    </p:spTree>
+  </p:cSld>
+  <p:clrMapOvr>
+    <a:masterClrMapping/>
+  </p:clrMapOvr>
+</p:sld>
+</file>
+
+<file path=ppt/slides/slide12.xml><?xml version="1.0" encoding="utf-8"?>
+<p:sld xmlns:a="http://schemas.openxmlformats.org/drawingml/2006/main" xmlns:p="http://schemas.openxmlformats.org/presentationml/2006/main" xmlns:r="http://schemas.openxmlformats.org/officeDocument/2006/relationships">
+  <p:cSld>
+    <p:spTree>
+      <p:nvGrpSpPr>
+        <p:cNvPr id="1" name=""/>
+        <p:cNvGrpSpPr/>
+        <p:nvPr/>
+      </p:nvGrpSpPr>
+      <p:grpSpPr/>
+      <p:sp>
+        <p:nvSpPr>
+          <p:cNvPr id="2" name="Title 1"/>
+          <p:cNvSpPr>
+            <a:spLocks noGrp="1"/>
+          </p:cNvSpPr>
+          <p:nvPr>
+            <p:ph type="title"/>
+          </p:nvPr>
+        </p:nvSpPr>
+        <p:spPr/>
+        <p:txBody>
+          <a:bodyPr/>
+          <a:lstStyle/>
+          <a:p>
+            <a:r>
+              <a:t>Expected outcomes of more renewable energy — by age group</a:t>
+            </a:r>
+          </a:p>
+        </p:txBody>
+      </p:sp>
+      <p:sp>
+        <p:nvSpPr>
+          <p:cNvPr id="3" name="Text Placeholder 2"/>
+          <p:cNvSpPr>
+            <a:spLocks noGrp="1"/>
+          </p:cNvSpPr>
+          <p:nvPr>
+            <p:ph type="body" idx="21" sz="quarter"/>
+          </p:nvPr>
+        </p:nvSpPr>
+        <p:spPr/>
+        <p:txBody>
+          <a:bodyPr/>
+          <a:lstStyle/>
+          <a:p>
+            <a:r>
+              <a:t>% who think each outcome is 'likely' if WA used more renewable energy</a:t>
+            </a:r>
+          </a:p>
+        </p:txBody>
+      </p:sp>
+      <p:sp>
+        <p:nvSpPr>
+          <p:cNvPr id="4" name="Text Placeholder 3"/>
+          <p:cNvSpPr>
+            <a:spLocks noGrp="1"/>
+          </p:cNvSpPr>
+          <p:nvPr>
+            <p:ph type="body" idx="22" sz="quarter"/>
+          </p:nvPr>
+        </p:nvSpPr>
+        <p:spPr/>
+        <p:txBody>
+          <a:bodyPr/>
+          <a:lstStyle/>
+          <a:p>
+            <a:r>
+              <a:t>Base: all respondents (n=1,011; illustrative breakdowns)</a:t>
+            </a:r>
+          </a:p>
+        </p:txBody>
+      </p:sp>
+      <p:pic>
+        <p:nvPicPr>
+          <p:cNvPr id="5" name="Picture 4" descr="image.png"/>
+          <p:cNvPicPr>
+            <a:picLocks noChangeAspect="1"/>
+          </p:cNvPicPr>
+          <p:nvPr/>
+        </p:nvPicPr>
+        <p:blipFill>
+          <a:blip r:embed="rId2"/>
+          <a:stretch>
+            <a:fillRect/>
+          </a:stretch>
+        </p:blipFill>
+        <p:spPr>
+          <a:xfrm>
+            <a:off x="310896" y="2061972"/>
+            <a:ext cx="8229600" cy="3931920"/>
+          </a:xfrm>
+          <a:prstGeom prst="rect">
+            <a:avLst/>
+          </a:prstGeom>
+        </p:spPr>
+      </p:pic>
+      <p:sp>
+        <p:nvSpPr>
+          <p:cNvPr id="6" name="TextBox 5"/>
+          <p:cNvSpPr txBox="1"/>
+          <p:nvPr/>
+        </p:nvSpPr>
+        <p:spPr>
+          <a:xfrm>
+            <a:off x="8686800" y="2061972"/>
+            <a:ext cx="3136391" cy="3931920"/>
+          </a:xfrm>
+          <a:prstGeom prst="rect">
+            <a:avLst/>
+          </a:prstGeom>
+          <a:noFill/>
+        </p:spPr>
+        <p:txBody>
+          <a:bodyPr wrap="square">
+            <a:spAutoFit/>
+          </a:bodyPr>
+          <a:lstStyle/>
+          <a:p>
+            <a:r>
+              <a:rPr sz="1400" b="0">
+                <a:solidFill>
+                  <a:srgbClr val="44546A"/>
+                </a:solidFill>
+                <a:latin typeface="DM Sans"/>
+              </a:rPr>
+              <a:t>Younger cohorts are consistently more</a:t>
+            </a:r>
+          </a:p>
+          <a:p>
+            <a:r>
+              <a:rPr sz="1400" b="0">
+                <a:solidFill>
+                  <a:srgbClr val="44546A"/>
+                </a:solidFill>
+                <a:latin typeface="DM Sans"/>
+              </a:rPr>
+              <a:t>optimistic about renewable energy outcomes.</a:t>
+            </a:r>
+          </a:p>
+          <a:p>
+            <a:r>
+              <a:rPr sz="1400" b="0">
+                <a:solidFill>
+                  <a:srgbClr val="44546A"/>
+                </a:solidFill>
+                <a:latin typeface="DM Sans"/>
+              </a:rPr>
+              <a:t/>
+            </a:r>
+          </a:p>
+          <a:p>
+            <a:r>
+              <a:rPr sz="1400" b="0">
+                <a:solidFill>
+                  <a:srgbClr val="00BDBB"/>
+                </a:solidFill>
+                <a:latin typeface="DM Sans"/>
+              </a:rPr>
+              <a:t>  ↑ 18–29 lead on almost every outcome</a:t>
+            </a:r>
+          </a:p>
+          <a:p>
+            <a:r>
+              <a:rPr sz="1400" b="0">
+                <a:solidFill>
+                  <a:srgbClr val="A32015"/>
+                </a:solidFill>
+                <a:latin typeface="DM Sans"/>
+              </a:rPr>
+              <a:t>  ↓ 60+ most sceptical on power prices</a:t>
+            </a:r>
+          </a:p>
+        </p:txBody>
+      </p:sp>
     </p:spTree>
   </p:cSld>
   <p:clrMapOvr>

--- a/sample_data/wa_energy_output.pptx
+++ b/sample_data/wa_energy_output.pptx
@@ -8203,91 +8203,13 @@
         <p:spPr>
           <a:xfrm>
             <a:off x="310896" y="2061972"/>
-            <a:ext cx="8229600" cy="3931920"/>
+            <a:ext cx="11567160" cy="3931920"/>
           </a:xfrm>
           <a:prstGeom prst="rect">
             <a:avLst/>
           </a:prstGeom>
         </p:spPr>
       </p:pic>
-      <p:sp>
-        <p:nvSpPr>
-          <p:cNvPr id="6" name="TextBox 5"/>
-          <p:cNvSpPr txBox="1"/>
-          <p:nvPr/>
-        </p:nvSpPr>
-        <p:spPr>
-          <a:xfrm>
-            <a:off x="8686800" y="2061972"/>
-            <a:ext cx="3136391" cy="3931920"/>
-          </a:xfrm>
-          <a:prstGeom prst="rect">
-            <a:avLst/>
-          </a:prstGeom>
-          <a:noFill/>
-        </p:spPr>
-        <p:txBody>
-          <a:bodyPr wrap="square">
-            <a:spAutoFit/>
-          </a:bodyPr>
-          <a:lstStyle/>
-          <a:p>
-            <a:r>
-              <a:rPr sz="1400" b="0">
-                <a:solidFill>
-                  <a:srgbClr val="44546A"/>
-                </a:solidFill>
-                <a:latin typeface="DM Sans"/>
-              </a:rPr>
-              <a:t>Younger cohorts are consistently more</a:t>
-            </a:r>
-          </a:p>
-          <a:p>
-            <a:r>
-              <a:rPr sz="1400" b="0">
-                <a:solidFill>
-                  <a:srgbClr val="44546A"/>
-                </a:solidFill>
-                <a:latin typeface="DM Sans"/>
-              </a:rPr>
-              <a:t>optimistic about renewable energy outcomes.</a:t>
-            </a:r>
-          </a:p>
-          <a:p>
-            <a:r>
-              <a:rPr sz="1400" b="0">
-                <a:solidFill>
-                  <a:srgbClr val="44546A"/>
-                </a:solidFill>
-                <a:latin typeface="DM Sans"/>
-              </a:rPr>
-              <a:t/>
-            </a:r>
-          </a:p>
-          <a:p>
-            <a:r>
-              <a:rPr sz="1400" b="0">
-                <a:solidFill>
-                  <a:srgbClr val="00BDBB"/>
-                </a:solidFill>
-                <a:latin typeface="DM Sans"/>
-              </a:rPr>
-              <a:t>  ↑ 18–29 lead on almost every outcome</a:t>
-            </a:r>
-          </a:p>
-          <a:p>
-            <a:r>
-              <a:rPr sz="1400" b="0">
-                <a:solidFill>
-                  <a:srgbClr val="A32015"/>
-                </a:solidFill>
-                <a:latin typeface="DM Sans"/>
-              </a:rPr>
-              <a:t>  ↓ 60+ most sceptical on power prices</a:t>
-            </a:r>
-          </a:p>
-        </p:txBody>
-      </p:sp>
     </p:spTree>
   </p:cSld>
   <p:clrMapOvr>

--- a/sample_data/wa_energy_output.pptx
+++ b/sample_data/wa_energy_output.pptx
@@ -7137,18 +7137,18 @@
                     <a:p>
                       <a:pPr algn="l"/>
                       <a:r>
-                        <a:rPr sz="1000" b="1">
+                        <a:rPr sz="1400" b="1">
                           <a:solidFill>
-                            <a:srgbClr val="027F7C"/>
+                            <a:srgbClr val="1A1A1A"/>
                           </a:solidFill>
                           <a:latin typeface="DM Sans"/>
                         </a:rPr>
                         <a:t>Targets create direction and momentum</a:t>
                       </a:r>
                       <a:r>
-                        <a:rPr sz="1000" b="0">
+                        <a:rPr sz="1400" b="0">
                           <a:solidFill>
-                            <a:srgbClr val="027F7C"/>
+                            <a:srgbClr val="1A1A1A"/>
                           </a:solidFill>
                           <a:latin typeface="DM Sans"/>
                         </a:rPr>
@@ -7169,9 +7169,9 @@
                     <a:p>
                       <a:pPr algn="ctr"/>
                       <a:r>
-                        <a:rPr sz="1000" b="1">
+                        <a:rPr sz="1400" b="1">
                           <a:solidFill>
-                            <a:srgbClr val="027F7C"/>
+                            <a:srgbClr val="1A1A1A"/>
                           </a:solidFill>
                           <a:latin typeface="DM Sans"/>
                         </a:rPr>
@@ -7194,18 +7194,18 @@
                     <a:p>
                       <a:pPr algn="l"/>
                       <a:r>
-                        <a:rPr sz="1000" b="1">
+                        <a:rPr sz="1400" b="1">
                           <a:solidFill>
-                            <a:srgbClr val="44546A"/>
+                            <a:srgbClr val="1A1A1A"/>
                           </a:solidFill>
                           <a:latin typeface="DM Sans"/>
                         </a:rPr>
                         <a:t>“Right thing to do” / general support</a:t>
                       </a:r>
                       <a:r>
-                        <a:rPr sz="1000" b="0">
+                        <a:rPr sz="1400" b="0">
                           <a:solidFill>
-                            <a:srgbClr val="44546A"/>
+                            <a:srgbClr val="1A1A1A"/>
                           </a:solidFill>
                           <a:latin typeface="DM Sans"/>
                         </a:rPr>
@@ -7226,9 +7226,9 @@
                     <a:p>
                       <a:pPr algn="ctr"/>
                       <a:r>
-                        <a:rPr sz="1000" b="1">
+                        <a:rPr sz="1400" b="1">
                           <a:solidFill>
-                            <a:srgbClr val="027F7C"/>
+                            <a:srgbClr val="1A1A1A"/>
                           </a:solidFill>
                           <a:latin typeface="DM Sans"/>
                         </a:rPr>
@@ -7251,18 +7251,18 @@
                     <a:p>
                       <a:pPr algn="l"/>
                       <a:r>
-                        <a:rPr sz="1000" b="1">
+                        <a:rPr sz="1400" b="1">
                           <a:solidFill>
-                            <a:srgbClr val="44546A"/>
+                            <a:srgbClr val="1A1A1A"/>
                           </a:solidFill>
                           <a:latin typeface="DM Sans"/>
                         </a:rPr>
                         <a:t>Better environment and health outcomes</a:t>
                       </a:r>
                       <a:r>
-                        <a:rPr sz="1000" b="0">
+                        <a:rPr sz="1400" b="0">
                           <a:solidFill>
-                            <a:srgbClr val="44546A"/>
+                            <a:srgbClr val="1A1A1A"/>
                           </a:solidFill>
                           <a:latin typeface="DM Sans"/>
                         </a:rPr>
@@ -7283,9 +7283,9 @@
                     <a:p>
                       <a:pPr algn="ctr"/>
                       <a:r>
-                        <a:rPr sz="1000" b="1">
+                        <a:rPr sz="1400" b="1">
                           <a:solidFill>
-                            <a:srgbClr val="44546A"/>
+                            <a:srgbClr val="1A1A1A"/>
                           </a:solidFill>
                           <a:latin typeface="DM Sans"/>
                         </a:rPr>
@@ -7308,18 +7308,18 @@
                     <a:p>
                       <a:pPr algn="l"/>
                       <a:r>
-                        <a:rPr sz="1000" b="1">
+                        <a:rPr sz="1400" b="1">
                           <a:solidFill>
-                            <a:srgbClr val="44546A"/>
+                            <a:srgbClr val="1A1A1A"/>
                           </a:solidFill>
                           <a:latin typeface="DM Sans"/>
                         </a:rPr>
                         <a:t>Climate change and emissions reduction</a:t>
                       </a:r>
                       <a:r>
-                        <a:rPr sz="1000" b="0">
+                        <a:rPr sz="1400" b="0">
                           <a:solidFill>
-                            <a:srgbClr val="44546A"/>
+                            <a:srgbClr val="1A1A1A"/>
                           </a:solidFill>
                           <a:latin typeface="DM Sans"/>
                         </a:rPr>
@@ -7340,9 +7340,9 @@
                     <a:p>
                       <a:pPr algn="ctr"/>
                       <a:r>
-                        <a:rPr sz="1000" b="1">
+                        <a:rPr sz="1400" b="1">
                           <a:solidFill>
-                            <a:srgbClr val="44546A"/>
+                            <a:srgbClr val="1A1A1A"/>
                           </a:solidFill>
                           <a:latin typeface="DM Sans"/>
                         </a:rPr>
@@ -7365,18 +7365,18 @@
                     <a:p>
                       <a:pPr algn="l"/>
                       <a:r>
-                        <a:rPr sz="1000" b="1">
+                        <a:rPr sz="1400" b="1">
                           <a:solidFill>
-                            <a:srgbClr val="44546A"/>
+                            <a:srgbClr val="1A1A1A"/>
                           </a:solidFill>
                           <a:latin typeface="DM Sans"/>
                         </a:rPr>
                         <a:t>Reduce reliance on fossil fuels</a:t>
                       </a:r>
                       <a:r>
-                        <a:rPr sz="1000" b="0">
+                        <a:rPr sz="1400" b="0">
                           <a:solidFill>
-                            <a:srgbClr val="44546A"/>
+                            <a:srgbClr val="1A1A1A"/>
                           </a:solidFill>
                           <a:latin typeface="DM Sans"/>
                         </a:rPr>
@@ -7397,9 +7397,9 @@
                     <a:p>
                       <a:pPr algn="ctr"/>
                       <a:r>
-                        <a:rPr sz="1000" b="1">
+                        <a:rPr sz="1400" b="1">
                           <a:solidFill>
-                            <a:srgbClr val="44546A"/>
+                            <a:srgbClr val="1A1A1A"/>
                           </a:solidFill>
                           <a:latin typeface="DM Sans"/>
                         </a:rPr>
@@ -7422,18 +7422,18 @@
                     <a:p>
                       <a:pPr algn="l"/>
                       <a:r>
-                        <a:rPr sz="1000" b="1">
+                        <a:rPr sz="1400" b="1">
                           <a:solidFill>
-                            <a:srgbClr val="44546A"/>
+                            <a:srgbClr val="1A1A1A"/>
                           </a:solidFill>
                           <a:latin typeface="DM Sans"/>
                         </a:rPr>
                         <a:t>Accountability and measurement</a:t>
                       </a:r>
                       <a:r>
-                        <a:rPr sz="1000" b="0">
+                        <a:rPr sz="1400" b="0">
                           <a:solidFill>
-                            <a:srgbClr val="44546A"/>
+                            <a:srgbClr val="1A1A1A"/>
                           </a:solidFill>
                           <a:latin typeface="DM Sans"/>
                         </a:rPr>
@@ -7454,9 +7454,9 @@
                     <a:p>
                       <a:pPr algn="ctr"/>
                       <a:r>
-                        <a:rPr sz="1000" b="1">
+                        <a:rPr sz="1400" b="1">
                           <a:solidFill>
-                            <a:srgbClr val="44546A"/>
+                            <a:srgbClr val="1A1A1A"/>
                           </a:solidFill>
                           <a:latin typeface="DM Sans"/>
                         </a:rPr>
@@ -7479,18 +7479,18 @@
                     <a:p>
                       <a:pPr algn="l"/>
                       <a:r>
-                        <a:rPr sz="1000" b="1">
+                        <a:rPr sz="1400" b="1">
                           <a:solidFill>
-                            <a:srgbClr val="44546A"/>
+                            <a:srgbClr val="1A1A1A"/>
                           </a:solidFill>
                           <a:latin typeface="DM Sans"/>
                         </a:rPr>
                         <a:t>Cost of living and cheaper power over time</a:t>
                       </a:r>
                       <a:r>
-                        <a:rPr sz="1000" b="0">
+                        <a:rPr sz="1400" b="0">
                           <a:solidFill>
-                            <a:srgbClr val="44546A"/>
+                            <a:srgbClr val="1A1A1A"/>
                           </a:solidFill>
                           <a:latin typeface="DM Sans"/>
                         </a:rPr>
@@ -7511,9 +7511,9 @@
                     <a:p>
                       <a:pPr algn="ctr"/>
                       <a:r>
-                        <a:rPr sz="1000" b="1">
+                        <a:rPr sz="1400" b="1">
                           <a:solidFill>
-                            <a:srgbClr val="44546A"/>
+                            <a:srgbClr val="1A1A1A"/>
                           </a:solidFill>
                           <a:latin typeface="DM Sans"/>
                         </a:rPr>
@@ -7536,18 +7536,18 @@
                     <a:p>
                       <a:pPr algn="l"/>
                       <a:r>
-                        <a:rPr sz="1000" b="1">
+                        <a:rPr sz="1400" b="1">
                           <a:solidFill>
-                            <a:srgbClr val="44546A"/>
+                            <a:srgbClr val="1A1A1A"/>
                           </a:solidFill>
                           <a:latin typeface="DM Sans"/>
                         </a:rPr>
                         <a:t>Future generations</a:t>
                       </a:r>
                       <a:r>
-                        <a:rPr sz="1000" b="0">
+                        <a:rPr sz="1400" b="0">
                           <a:solidFill>
-                            <a:srgbClr val="44546A"/>
+                            <a:srgbClr val="1A1A1A"/>
                           </a:solidFill>
                           <a:latin typeface="DM Sans"/>
                         </a:rPr>
@@ -7568,9 +7568,9 @@
                     <a:p>
                       <a:pPr algn="ctr"/>
                       <a:r>
-                        <a:rPr sz="1000" b="1">
+                        <a:rPr sz="1400" b="1">
                           <a:solidFill>
-                            <a:srgbClr val="44546A"/>
+                            <a:srgbClr val="1A1A1A"/>
                           </a:solidFill>
                           <a:latin typeface="DM Sans"/>
                         </a:rPr>
@@ -7593,18 +7593,18 @@
                     <a:p>
                       <a:pPr algn="l"/>
                       <a:r>
-                        <a:rPr sz="1000" b="1">
+                        <a:rPr sz="1400" b="1">
                           <a:solidFill>
-                            <a:srgbClr val="44546A"/>
+                            <a:srgbClr val="1A1A1A"/>
                           </a:solidFill>
                           <a:latin typeface="DM Sans"/>
                         </a:rPr>
                         <a:t>Conditional support focused on feasibility</a:t>
                       </a:r>
                       <a:r>
-                        <a:rPr sz="1000" b="0">
+                        <a:rPr sz="1400" b="0">
                           <a:solidFill>
-                            <a:srgbClr val="44546A"/>
+                            <a:srgbClr val="1A1A1A"/>
                           </a:solidFill>
                           <a:latin typeface="DM Sans"/>
                         </a:rPr>
@@ -7625,9 +7625,9 @@
                     <a:p>
                       <a:pPr algn="ctr"/>
                       <a:r>
-                        <a:rPr sz="1000" b="1">
+                        <a:rPr sz="1400" b="1">
                           <a:solidFill>
-                            <a:srgbClr val="44546A"/>
+                            <a:srgbClr val="1A1A1A"/>
                           </a:solidFill>
                           <a:latin typeface="DM Sans"/>
                         </a:rPr>
@@ -7650,18 +7650,18 @@
                     <a:p>
                       <a:pPr algn="l"/>
                       <a:r>
-                        <a:rPr sz="1000" b="1">
+                        <a:rPr sz="1400" b="1">
                           <a:solidFill>
-                            <a:srgbClr val="44546A"/>
+                            <a:srgbClr val="1A1A1A"/>
                           </a:solidFill>
                           <a:latin typeface="DM Sans"/>
                         </a:rPr>
                         <a:t>Economic opportunity and jobs</a:t>
                       </a:r>
                       <a:r>
-                        <a:rPr sz="1000" b="0">
+                        <a:rPr sz="1400" b="0">
                           <a:solidFill>
-                            <a:srgbClr val="44546A"/>
+                            <a:srgbClr val="1A1A1A"/>
                           </a:solidFill>
                           <a:latin typeface="DM Sans"/>
                         </a:rPr>
@@ -7682,9 +7682,9 @@
                     <a:p>
                       <a:pPr algn="ctr"/>
                       <a:r>
-                        <a:rPr sz="1000" b="1">
+                        <a:rPr sz="1400" b="1">
                           <a:solidFill>
-                            <a:srgbClr val="44546A"/>
+                            <a:srgbClr val="1A1A1A"/>
                           </a:solidFill>
                           <a:latin typeface="DM Sans"/>
                         </a:rPr>
@@ -7707,18 +7707,18 @@
                     <a:p>
                       <a:pPr algn="l"/>
                       <a:r>
-                        <a:rPr sz="1000" b="1">
+                        <a:rPr sz="1400" b="1">
                           <a:solidFill>
-                            <a:srgbClr val="44546A"/>
+                            <a:srgbClr val="1A1A1A"/>
                           </a:solidFill>
                           <a:latin typeface="DM Sans"/>
                         </a:rPr>
                         <a:t>Energy security and reliability</a:t>
                       </a:r>
                       <a:r>
-                        <a:rPr sz="1000" b="0">
+                        <a:rPr sz="1400" b="0">
                           <a:solidFill>
-                            <a:srgbClr val="44546A"/>
+                            <a:srgbClr val="1A1A1A"/>
                           </a:solidFill>
                           <a:latin typeface="DM Sans"/>
                         </a:rPr>
@@ -7739,9 +7739,9 @@
                     <a:p>
                       <a:pPr algn="ctr"/>
                       <a:r>
-                        <a:rPr sz="1000" b="1">
+                        <a:rPr sz="1400" b="1">
                           <a:solidFill>
-                            <a:srgbClr val="44546A"/>
+                            <a:srgbClr val="1A1A1A"/>
                           </a:solidFill>
                           <a:latin typeface="DM Sans"/>
                         </a:rPr>
@@ -7764,18 +7764,18 @@
                     <a:p>
                       <a:pPr algn="l"/>
                       <a:r>
-                        <a:rPr sz="1000" b="1">
+                        <a:rPr sz="1400" b="1">
                           <a:solidFill>
-                            <a:srgbClr val="44546A"/>
+                            <a:srgbClr val="1A1A1A"/>
                           </a:solidFill>
                           <a:latin typeface="DM Sans"/>
                         </a:rPr>
                         <a:t>Dissatisfaction with politics or delivery</a:t>
                       </a:r>
                       <a:r>
-                        <a:rPr sz="1000" b="0">
+                        <a:rPr sz="1400" b="0">
                           <a:solidFill>
-                            <a:srgbClr val="44546A"/>
+                            <a:srgbClr val="1A1A1A"/>
                           </a:solidFill>
                           <a:latin typeface="DM Sans"/>
                         </a:rPr>
@@ -7796,9 +7796,9 @@
                     <a:p>
                       <a:pPr algn="ctr"/>
                       <a:r>
-                        <a:rPr sz="1000" b="1">
+                        <a:rPr sz="1400" b="1">
                           <a:solidFill>
-                            <a:srgbClr val="44546A"/>
+                            <a:srgbClr val="1A1A1A"/>
                           </a:solidFill>
                           <a:latin typeface="DM Sans"/>
                         </a:rPr>
@@ -7821,18 +7821,18 @@
                     <a:p>
                       <a:pPr algn="l"/>
                       <a:r>
-                        <a:rPr sz="1000" b="1">
+                        <a:rPr sz="1400" b="1">
                           <a:solidFill>
-                            <a:srgbClr val="44546A"/>
+                            <a:srgbClr val="1A1A1A"/>
                           </a:solidFill>
                           <a:latin typeface="DM Sans"/>
                         </a:rPr>
                         <a:t>Certainty for planning and investment</a:t>
                       </a:r>
                       <a:r>
-                        <a:rPr sz="1000" b="0">
+                        <a:rPr sz="1400" b="0">
                           <a:solidFill>
-                            <a:srgbClr val="44546A"/>
+                            <a:srgbClr val="1A1A1A"/>
                           </a:solidFill>
                           <a:latin typeface="DM Sans"/>
                         </a:rPr>
@@ -7853,9 +7853,9 @@
                     <a:p>
                       <a:pPr algn="ctr"/>
                       <a:r>
-                        <a:rPr sz="1000" b="1">
+                        <a:rPr sz="1400" b="1">
                           <a:solidFill>
-                            <a:srgbClr val="44546A"/>
+                            <a:srgbClr val="1A1A1A"/>
                           </a:solidFill>
                           <a:latin typeface="DM Sans"/>
                         </a:rPr>
@@ -7878,9 +7878,9 @@
                     <a:p>
                       <a:pPr algn="l"/>
                       <a:r>
-                        <a:rPr sz="1000" b="1">
+                        <a:rPr sz="1400" b="1">
                           <a:solidFill>
-                            <a:srgbClr val="44546A"/>
+                            <a:srgbClr val="1A1A1A"/>
                           </a:solidFill>
                           <a:latin typeface="DM Sans"/>
                         </a:rPr>
@@ -7901,9 +7901,9 @@
                     <a:p>
                       <a:pPr algn="ctr"/>
                       <a:r>
-                        <a:rPr sz="1000" b="1">
+                        <a:rPr sz="1400" b="1">
                           <a:solidFill>
-                            <a:srgbClr val="44546A"/>
+                            <a:srgbClr val="1A1A1A"/>
                           </a:solidFill>
                           <a:latin typeface="DM Sans"/>
                         </a:rPr>
